--- a/slides/sesion-02.pptx
+++ b/slides/sesion-02.pptx
@@ -5,20 +5,19 @@
     <p:sldMasterId id="2147483648" r:id="rId1"/>
   </p:sldMasterIdLst>
   <p:sldIdLst>
-    <p:sldId id="256" r:id="rId7"/>
-    <p:sldId id="257" r:id="rId8"/>
-    <p:sldId id="258" r:id="rId9"/>
-    <p:sldId id="259" r:id="rId10"/>
-    <p:sldId id="260" r:id="rId11"/>
-    <p:sldId id="261" r:id="rId12"/>
-    <p:sldId id="262" r:id="rId13"/>
-    <p:sldId id="263" r:id="rId14"/>
-    <p:sldId id="264" r:id="rId15"/>
-    <p:sldId id="265" r:id="rId16"/>
-    <p:sldId id="266" r:id="rId17"/>
-    <p:sldId id="267" r:id="rId18"/>
+    <p:sldId id="256" r:id="rId2"/>
+    <p:sldId id="257" r:id="rId3"/>
+    <p:sldId id="258" r:id="rId4"/>
+    <p:sldId id="259" r:id="rId5"/>
+    <p:sldId id="261" r:id="rId6"/>
+    <p:sldId id="262" r:id="rId7"/>
+    <p:sldId id="263" r:id="rId8"/>
+    <p:sldId id="264" r:id="rId9"/>
+    <p:sldId id="265" r:id="rId10"/>
+    <p:sldId id="266" r:id="rId11"/>
+    <p:sldId id="267" r:id="rId12"/>
   </p:sldIdLst>
-  <p:sldSz cx="12191695" cy="6858000" type="screen4x3"/>
+  <p:sldSz cx="12192000" cy="6858000"/>
   <p:notesSz cx="6858000" cy="9144000"/>
   <p:defaultTextStyle>
     <a:defPPr>
@@ -115,6 +114,22 @@
       </a:defRPr>
     </a:lvl9pPr>
   </p:defaultTextStyle>
+  <p:extLst>
+    <p:ext uri="{EFAFB233-063F-42B5-8137-9DF3F51BA10A}">
+      <p15:sldGuideLst xmlns:p15="http://schemas.microsoft.com/office/powerpoint/2012/main">
+        <p15:guide id="1" orient="horz" pos="2160">
+          <p15:clr>
+            <a:srgbClr val="A4A3A4"/>
+          </p15:clr>
+        </p15:guide>
+        <p15:guide id="2" pos="2880">
+          <p15:clr>
+            <a:srgbClr val="A4A3A4"/>
+          </p15:clr>
+        </p15:guide>
+      </p15:sldGuideLst>
+    </p:ext>
+  </p:extLst>
 </p:presentation>
 </file>
 
@@ -156,10 +171,9 @@
           <a:lstStyle/>
           <a:p>
             <a:r>
-              <a:rPr lang="en-US" smtClean="0"/>
+              <a:rPr lang="en-US"/>
               <a:t>Click to edit Master title style</a:t>
             </a:r>
-            <a:endParaRPr lang="en-US"/>
           </a:p>
         </p:txBody>
       </p:sp>
@@ -275,10 +289,9 @@
           </a:lstStyle>
           <a:p>
             <a:r>
-              <a:rPr lang="en-US" smtClean="0"/>
+              <a:rPr lang="en-US"/>
               <a:t>Click to edit Master subtitle style</a:t>
             </a:r>
-            <a:endParaRPr lang="en-US"/>
           </a:p>
         </p:txBody>
       </p:sp>
@@ -299,7 +312,7 @@
           <a:p>
             <a:fld id="{5BCAD085-E8A6-8845-BD4E-CB4CCA059FC4}" type="datetimeFigureOut">
               <a:rPr lang="en-US" smtClean="0"/>
-              <a:t>1/27/13</a:t>
+              <a:t>7/13/26</a:t>
             </a:fld>
             <a:endParaRPr lang="en-US"/>
           </a:p>
@@ -393,10 +406,9 @@
           <a:lstStyle/>
           <a:p>
             <a:r>
-              <a:rPr lang="en-US" smtClean="0"/>
+              <a:rPr lang="en-US"/>
               <a:t>Click to edit Master title style</a:t>
             </a:r>
-            <a:endParaRPr lang="en-US"/>
           </a:p>
         </p:txBody>
       </p:sp>
@@ -417,38 +429,37 @@
           <a:p>
             <a:pPr lvl="0"/>
             <a:r>
-              <a:rPr lang="en-US" smtClean="0"/>
+              <a:rPr lang="en-US"/>
               <a:t>Click to edit Master text styles</a:t>
             </a:r>
           </a:p>
           <a:p>
             <a:pPr lvl="1"/>
             <a:r>
-              <a:rPr lang="en-US" smtClean="0"/>
+              <a:rPr lang="en-US"/>
               <a:t>Second level</a:t>
             </a:r>
           </a:p>
           <a:p>
             <a:pPr lvl="2"/>
             <a:r>
-              <a:rPr lang="en-US" smtClean="0"/>
+              <a:rPr lang="en-US"/>
               <a:t>Third level</a:t>
             </a:r>
           </a:p>
           <a:p>
             <a:pPr lvl="3"/>
             <a:r>
-              <a:rPr lang="en-US" smtClean="0"/>
+              <a:rPr lang="en-US"/>
               <a:t>Fourth level</a:t>
             </a:r>
           </a:p>
           <a:p>
             <a:pPr lvl="4"/>
             <a:r>
-              <a:rPr lang="en-US" smtClean="0"/>
+              <a:rPr lang="en-US"/>
               <a:t>Fifth level</a:t>
             </a:r>
-            <a:endParaRPr lang="en-US"/>
           </a:p>
         </p:txBody>
       </p:sp>
@@ -469,7 +480,7 @@
           <a:p>
             <a:fld id="{5BCAD085-E8A6-8845-BD4E-CB4CCA059FC4}" type="datetimeFigureOut">
               <a:rPr lang="en-US" smtClean="0"/>
-              <a:t>1/27/13</a:t>
+              <a:t>7/13/26</a:t>
             </a:fld>
             <a:endParaRPr lang="en-US"/>
           </a:p>
@@ -568,10 +579,9 @@
           <a:lstStyle/>
           <a:p>
             <a:r>
-              <a:rPr lang="en-US" smtClean="0"/>
+              <a:rPr lang="en-US"/>
               <a:t>Click to edit Master title style</a:t>
             </a:r>
-            <a:endParaRPr lang="en-US"/>
           </a:p>
         </p:txBody>
       </p:sp>
@@ -597,38 +607,37 @@
           <a:p>
             <a:pPr lvl="0"/>
             <a:r>
-              <a:rPr lang="en-US" smtClean="0"/>
+              <a:rPr lang="en-US"/>
               <a:t>Click to edit Master text styles</a:t>
             </a:r>
           </a:p>
           <a:p>
             <a:pPr lvl="1"/>
             <a:r>
-              <a:rPr lang="en-US" smtClean="0"/>
+              <a:rPr lang="en-US"/>
               <a:t>Second level</a:t>
             </a:r>
           </a:p>
           <a:p>
             <a:pPr lvl="2"/>
             <a:r>
-              <a:rPr lang="en-US" smtClean="0"/>
+              <a:rPr lang="en-US"/>
               <a:t>Third level</a:t>
             </a:r>
           </a:p>
           <a:p>
             <a:pPr lvl="3"/>
             <a:r>
-              <a:rPr lang="en-US" smtClean="0"/>
+              <a:rPr lang="en-US"/>
               <a:t>Fourth level</a:t>
             </a:r>
           </a:p>
           <a:p>
             <a:pPr lvl="4"/>
             <a:r>
-              <a:rPr lang="en-US" smtClean="0"/>
+              <a:rPr lang="en-US"/>
               <a:t>Fifth level</a:t>
             </a:r>
-            <a:endParaRPr lang="en-US"/>
           </a:p>
         </p:txBody>
       </p:sp>
@@ -649,7 +658,7 @@
           <a:p>
             <a:fld id="{5BCAD085-E8A6-8845-BD4E-CB4CCA059FC4}" type="datetimeFigureOut">
               <a:rPr lang="en-US" smtClean="0"/>
-              <a:t>1/27/13</a:t>
+              <a:t>7/13/26</a:t>
             </a:fld>
             <a:endParaRPr lang="en-US"/>
           </a:p>
@@ -743,10 +752,9 @@
           <a:lstStyle/>
           <a:p>
             <a:r>
-              <a:rPr lang="en-US" smtClean="0"/>
+              <a:rPr lang="en-US"/>
               <a:t>Click to edit Master title style</a:t>
             </a:r>
-            <a:endParaRPr lang="en-US"/>
           </a:p>
         </p:txBody>
       </p:sp>
@@ -767,38 +775,37 @@
           <a:p>
             <a:pPr lvl="0"/>
             <a:r>
-              <a:rPr lang="en-US" smtClean="0"/>
+              <a:rPr lang="en-US"/>
               <a:t>Click to edit Master text styles</a:t>
             </a:r>
           </a:p>
           <a:p>
             <a:pPr lvl="1"/>
             <a:r>
-              <a:rPr lang="en-US" smtClean="0"/>
+              <a:rPr lang="en-US"/>
               <a:t>Second level</a:t>
             </a:r>
           </a:p>
           <a:p>
             <a:pPr lvl="2"/>
             <a:r>
-              <a:rPr lang="en-US" smtClean="0"/>
+              <a:rPr lang="en-US"/>
               <a:t>Third level</a:t>
             </a:r>
           </a:p>
           <a:p>
             <a:pPr lvl="3"/>
             <a:r>
-              <a:rPr lang="en-US" smtClean="0"/>
+              <a:rPr lang="en-US"/>
               <a:t>Fourth level</a:t>
             </a:r>
           </a:p>
           <a:p>
             <a:pPr lvl="4"/>
             <a:r>
-              <a:rPr lang="en-US" smtClean="0"/>
+              <a:rPr lang="en-US"/>
               <a:t>Fifth level</a:t>
             </a:r>
-            <a:endParaRPr lang="en-US"/>
           </a:p>
         </p:txBody>
       </p:sp>
@@ -819,7 +826,7 @@
           <a:p>
             <a:fld id="{5BCAD085-E8A6-8845-BD4E-CB4CCA059FC4}" type="datetimeFigureOut">
               <a:rPr lang="en-US" smtClean="0"/>
-              <a:t>1/27/13</a:t>
+              <a:t>7/13/26</a:t>
             </a:fld>
             <a:endParaRPr lang="en-US"/>
           </a:p>
@@ -922,10 +929,9 @@
           </a:lstStyle>
           <a:p>
             <a:r>
-              <a:rPr lang="en-US" smtClean="0"/>
+              <a:rPr lang="en-US"/>
               <a:t>Click to edit Master title style</a:t>
             </a:r>
-            <a:endParaRPr lang="en-US"/>
           </a:p>
         </p:txBody>
       </p:sp>
@@ -1042,7 +1048,7 @@
           <a:p>
             <a:pPr lvl="0"/>
             <a:r>
-              <a:rPr lang="en-US" smtClean="0"/>
+              <a:rPr lang="en-US"/>
               <a:t>Click to edit Master text styles</a:t>
             </a:r>
           </a:p>
@@ -1065,7 +1071,7 @@
           <a:p>
             <a:fld id="{5BCAD085-E8A6-8845-BD4E-CB4CCA059FC4}" type="datetimeFigureOut">
               <a:rPr lang="en-US" smtClean="0"/>
-              <a:t>1/27/13</a:t>
+              <a:t>7/13/26</a:t>
             </a:fld>
             <a:endParaRPr lang="en-US"/>
           </a:p>
@@ -1159,10 +1165,9 @@
           <a:lstStyle/>
           <a:p>
             <a:r>
-              <a:rPr lang="en-US" smtClean="0"/>
+              <a:rPr lang="en-US"/>
               <a:t>Click to edit Master title style</a:t>
             </a:r>
-            <a:endParaRPr lang="en-US"/>
           </a:p>
         </p:txBody>
       </p:sp>
@@ -1216,38 +1221,37 @@
           <a:p>
             <a:pPr lvl="0"/>
             <a:r>
-              <a:rPr lang="en-US" smtClean="0"/>
+              <a:rPr lang="en-US"/>
               <a:t>Click to edit Master text styles</a:t>
             </a:r>
           </a:p>
           <a:p>
             <a:pPr lvl="1"/>
             <a:r>
-              <a:rPr lang="en-US" smtClean="0"/>
+              <a:rPr lang="en-US"/>
               <a:t>Second level</a:t>
             </a:r>
           </a:p>
           <a:p>
             <a:pPr lvl="2"/>
             <a:r>
-              <a:rPr lang="en-US" smtClean="0"/>
+              <a:rPr lang="en-US"/>
               <a:t>Third level</a:t>
             </a:r>
           </a:p>
           <a:p>
             <a:pPr lvl="3"/>
             <a:r>
-              <a:rPr lang="en-US" smtClean="0"/>
+              <a:rPr lang="en-US"/>
               <a:t>Fourth level</a:t>
             </a:r>
           </a:p>
           <a:p>
             <a:pPr lvl="4"/>
             <a:r>
-              <a:rPr lang="en-US" smtClean="0"/>
+              <a:rPr lang="en-US"/>
               <a:t>Fifth level</a:t>
             </a:r>
-            <a:endParaRPr lang="en-US"/>
           </a:p>
         </p:txBody>
       </p:sp>
@@ -1301,38 +1305,37 @@
           <a:p>
             <a:pPr lvl="0"/>
             <a:r>
-              <a:rPr lang="en-US" smtClean="0"/>
+              <a:rPr lang="en-US"/>
               <a:t>Click to edit Master text styles</a:t>
             </a:r>
           </a:p>
           <a:p>
             <a:pPr lvl="1"/>
             <a:r>
-              <a:rPr lang="en-US" smtClean="0"/>
+              <a:rPr lang="en-US"/>
               <a:t>Second level</a:t>
             </a:r>
           </a:p>
           <a:p>
             <a:pPr lvl="2"/>
             <a:r>
-              <a:rPr lang="en-US" smtClean="0"/>
+              <a:rPr lang="en-US"/>
               <a:t>Third level</a:t>
             </a:r>
           </a:p>
           <a:p>
             <a:pPr lvl="3"/>
             <a:r>
-              <a:rPr lang="en-US" smtClean="0"/>
+              <a:rPr lang="en-US"/>
               <a:t>Fourth level</a:t>
             </a:r>
           </a:p>
           <a:p>
             <a:pPr lvl="4"/>
             <a:r>
-              <a:rPr lang="en-US" smtClean="0"/>
+              <a:rPr lang="en-US"/>
               <a:t>Fifth level</a:t>
             </a:r>
-            <a:endParaRPr lang="en-US"/>
           </a:p>
         </p:txBody>
       </p:sp>
@@ -1353,7 +1356,7 @@
           <a:p>
             <a:fld id="{5BCAD085-E8A6-8845-BD4E-CB4CCA059FC4}" type="datetimeFigureOut">
               <a:rPr lang="en-US" smtClean="0"/>
-              <a:t>1/27/13</a:t>
+              <a:t>7/13/26</a:t>
             </a:fld>
             <a:endParaRPr lang="en-US"/>
           </a:p>
@@ -1451,10 +1454,9 @@
           </a:lstStyle>
           <a:p>
             <a:r>
-              <a:rPr lang="en-US" smtClean="0"/>
+              <a:rPr lang="en-US"/>
               <a:t>Click to edit Master title style</a:t>
             </a:r>
-            <a:endParaRPr lang="en-US"/>
           </a:p>
         </p:txBody>
       </p:sp>
@@ -1517,7 +1519,7 @@
           <a:p>
             <a:pPr lvl="0"/>
             <a:r>
-              <a:rPr lang="en-US" smtClean="0"/>
+              <a:rPr lang="en-US"/>
               <a:t>Click to edit Master text styles</a:t>
             </a:r>
           </a:p>
@@ -1573,38 +1575,37 @@
           <a:p>
             <a:pPr lvl="0"/>
             <a:r>
-              <a:rPr lang="en-US" smtClean="0"/>
+              <a:rPr lang="en-US"/>
               <a:t>Click to edit Master text styles</a:t>
             </a:r>
           </a:p>
           <a:p>
             <a:pPr lvl="1"/>
             <a:r>
-              <a:rPr lang="en-US" smtClean="0"/>
+              <a:rPr lang="en-US"/>
               <a:t>Second level</a:t>
             </a:r>
           </a:p>
           <a:p>
             <a:pPr lvl="2"/>
             <a:r>
-              <a:rPr lang="en-US" smtClean="0"/>
+              <a:rPr lang="en-US"/>
               <a:t>Third level</a:t>
             </a:r>
           </a:p>
           <a:p>
             <a:pPr lvl="3"/>
             <a:r>
-              <a:rPr lang="en-US" smtClean="0"/>
+              <a:rPr lang="en-US"/>
               <a:t>Fourth level</a:t>
             </a:r>
           </a:p>
           <a:p>
             <a:pPr lvl="4"/>
             <a:r>
-              <a:rPr lang="en-US" smtClean="0"/>
+              <a:rPr lang="en-US"/>
               <a:t>Fifth level</a:t>
             </a:r>
-            <a:endParaRPr lang="en-US"/>
           </a:p>
         </p:txBody>
       </p:sp>
@@ -1667,7 +1668,7 @@
           <a:p>
             <a:pPr lvl="0"/>
             <a:r>
-              <a:rPr lang="en-US" smtClean="0"/>
+              <a:rPr lang="en-US"/>
               <a:t>Click to edit Master text styles</a:t>
             </a:r>
           </a:p>
@@ -1723,38 +1724,37 @@
           <a:p>
             <a:pPr lvl="0"/>
             <a:r>
-              <a:rPr lang="en-US" smtClean="0"/>
+              <a:rPr lang="en-US"/>
               <a:t>Click to edit Master text styles</a:t>
             </a:r>
           </a:p>
           <a:p>
             <a:pPr lvl="1"/>
             <a:r>
-              <a:rPr lang="en-US" smtClean="0"/>
+              <a:rPr lang="en-US"/>
               <a:t>Second level</a:t>
             </a:r>
           </a:p>
           <a:p>
             <a:pPr lvl="2"/>
             <a:r>
-              <a:rPr lang="en-US" smtClean="0"/>
+              <a:rPr lang="en-US"/>
               <a:t>Third level</a:t>
             </a:r>
           </a:p>
           <a:p>
             <a:pPr lvl="3"/>
             <a:r>
-              <a:rPr lang="en-US" smtClean="0"/>
+              <a:rPr lang="en-US"/>
               <a:t>Fourth level</a:t>
             </a:r>
           </a:p>
           <a:p>
             <a:pPr lvl="4"/>
             <a:r>
-              <a:rPr lang="en-US" smtClean="0"/>
+              <a:rPr lang="en-US"/>
               <a:t>Fifth level</a:t>
             </a:r>
-            <a:endParaRPr lang="en-US"/>
           </a:p>
         </p:txBody>
       </p:sp>
@@ -1775,7 +1775,7 @@
           <a:p>
             <a:fld id="{5BCAD085-E8A6-8845-BD4E-CB4CCA059FC4}" type="datetimeFigureOut">
               <a:rPr lang="en-US" smtClean="0"/>
-              <a:t>1/27/13</a:t>
+              <a:t>7/13/26</a:t>
             </a:fld>
             <a:endParaRPr lang="en-US"/>
           </a:p>
@@ -1869,10 +1869,9 @@
           <a:lstStyle/>
           <a:p>
             <a:r>
-              <a:rPr lang="en-US" smtClean="0"/>
+              <a:rPr lang="en-US"/>
               <a:t>Click to edit Master title style</a:t>
             </a:r>
-            <a:endParaRPr lang="en-US"/>
           </a:p>
         </p:txBody>
       </p:sp>
@@ -1893,7 +1892,7 @@
           <a:p>
             <a:fld id="{5BCAD085-E8A6-8845-BD4E-CB4CCA059FC4}" type="datetimeFigureOut">
               <a:rPr lang="en-US" smtClean="0"/>
-              <a:t>1/27/13</a:t>
+              <a:t>7/13/26</a:t>
             </a:fld>
             <a:endParaRPr lang="en-US"/>
           </a:p>
@@ -1988,7 +1987,7 @@
           <a:p>
             <a:fld id="{5BCAD085-E8A6-8845-BD4E-CB4CCA059FC4}" type="datetimeFigureOut">
               <a:rPr lang="en-US" smtClean="0"/>
-              <a:t>1/27/13</a:t>
+              <a:t>7/13/26</a:t>
             </a:fld>
             <a:endParaRPr lang="en-US"/>
           </a:p>
@@ -2091,10 +2090,9 @@
           </a:lstStyle>
           <a:p>
             <a:r>
-              <a:rPr lang="en-US" smtClean="0"/>
+              <a:rPr lang="en-US"/>
               <a:t>Click to edit Master title style</a:t>
             </a:r>
-            <a:endParaRPr lang="en-US"/>
           </a:p>
         </p:txBody>
       </p:sp>
@@ -2148,38 +2146,37 @@
           <a:p>
             <a:pPr lvl="0"/>
             <a:r>
-              <a:rPr lang="en-US" smtClean="0"/>
+              <a:rPr lang="en-US"/>
               <a:t>Click to edit Master text styles</a:t>
             </a:r>
           </a:p>
           <a:p>
             <a:pPr lvl="1"/>
             <a:r>
-              <a:rPr lang="en-US" smtClean="0"/>
+              <a:rPr lang="en-US"/>
               <a:t>Second level</a:t>
             </a:r>
           </a:p>
           <a:p>
             <a:pPr lvl="2"/>
             <a:r>
-              <a:rPr lang="en-US" smtClean="0"/>
+              <a:rPr lang="en-US"/>
               <a:t>Third level</a:t>
             </a:r>
           </a:p>
           <a:p>
             <a:pPr lvl="3"/>
             <a:r>
-              <a:rPr lang="en-US" smtClean="0"/>
+              <a:rPr lang="en-US"/>
               <a:t>Fourth level</a:t>
             </a:r>
           </a:p>
           <a:p>
             <a:pPr lvl="4"/>
             <a:r>
-              <a:rPr lang="en-US" smtClean="0"/>
+              <a:rPr lang="en-US"/>
               <a:t>Fifth level</a:t>
             </a:r>
-            <a:endParaRPr lang="en-US"/>
           </a:p>
         </p:txBody>
       </p:sp>
@@ -2242,7 +2239,7 @@
           <a:p>
             <a:pPr lvl="0"/>
             <a:r>
-              <a:rPr lang="en-US" smtClean="0"/>
+              <a:rPr lang="en-US"/>
               <a:t>Click to edit Master text styles</a:t>
             </a:r>
           </a:p>
@@ -2265,7 +2262,7 @@
           <a:p>
             <a:fld id="{5BCAD085-E8A6-8845-BD4E-CB4CCA059FC4}" type="datetimeFigureOut">
               <a:rPr lang="en-US" smtClean="0"/>
-              <a:t>1/27/13</a:t>
+              <a:t>7/13/26</a:t>
             </a:fld>
             <a:endParaRPr lang="en-US"/>
           </a:p>
@@ -2368,10 +2365,9 @@
           </a:lstStyle>
           <a:p>
             <a:r>
-              <a:rPr lang="en-US" smtClean="0"/>
+              <a:rPr lang="en-US"/>
               <a:t>Click to edit Master title style</a:t>
             </a:r>
-            <a:endParaRPr lang="en-US"/>
           </a:p>
         </p:txBody>
       </p:sp>
@@ -2495,7 +2491,7 @@
           <a:p>
             <a:pPr lvl="0"/>
             <a:r>
-              <a:rPr lang="en-US" smtClean="0"/>
+              <a:rPr lang="en-US"/>
               <a:t>Click to edit Master text styles</a:t>
             </a:r>
           </a:p>
@@ -2518,7 +2514,7 @@
           <a:p>
             <a:fld id="{5BCAD085-E8A6-8845-BD4E-CB4CCA059FC4}" type="datetimeFigureOut">
               <a:rPr lang="en-US" smtClean="0"/>
-              <a:t>1/27/13</a:t>
+              <a:t>7/13/26</a:t>
             </a:fld>
             <a:endParaRPr lang="en-US"/>
           </a:p>
@@ -2627,10 +2623,9 @@
           <a:lstStyle/>
           <a:p>
             <a:r>
-              <a:rPr lang="en-US" smtClean="0"/>
+              <a:rPr lang="en-US"/>
               <a:t>Click to edit Master title style</a:t>
             </a:r>
-            <a:endParaRPr lang="en-US"/>
           </a:p>
         </p:txBody>
       </p:sp>
@@ -2661,38 +2656,37 @@
           <a:p>
             <a:pPr lvl="0"/>
             <a:r>
-              <a:rPr lang="en-US" smtClean="0"/>
+              <a:rPr lang="en-US"/>
               <a:t>Click to edit Master text styles</a:t>
             </a:r>
           </a:p>
           <a:p>
             <a:pPr lvl="1"/>
             <a:r>
-              <a:rPr lang="en-US" smtClean="0"/>
+              <a:rPr lang="en-US"/>
               <a:t>Second level</a:t>
             </a:r>
           </a:p>
           <a:p>
             <a:pPr lvl="2"/>
             <a:r>
-              <a:rPr lang="en-US" smtClean="0"/>
+              <a:rPr lang="en-US"/>
               <a:t>Third level</a:t>
             </a:r>
           </a:p>
           <a:p>
             <a:pPr lvl="3"/>
             <a:r>
-              <a:rPr lang="en-US" smtClean="0"/>
+              <a:rPr lang="en-US"/>
               <a:t>Fourth level</a:t>
             </a:r>
           </a:p>
           <a:p>
             <a:pPr lvl="4"/>
             <a:r>
-              <a:rPr lang="en-US" smtClean="0"/>
+              <a:rPr lang="en-US"/>
               <a:t>Fifth level</a:t>
             </a:r>
-            <a:endParaRPr lang="en-US"/>
           </a:p>
         </p:txBody>
       </p:sp>
@@ -2731,7 +2725,7 @@
           <a:p>
             <a:fld id="{5BCAD085-E8A6-8845-BD4E-CB4CCA059FC4}" type="datetimeFigureOut">
               <a:rPr lang="en-US" smtClean="0"/>
-              <a:t>1/27/13</a:t>
+              <a:t>7/13/26</a:t>
             </a:fld>
             <a:endParaRPr lang="en-US"/>
           </a:p>
@@ -3090,7 +3084,7 @@
 </file>
 
 <file path=ppt/slides/slide1.xml><?xml version="1.0" encoding="utf-8"?>
-<p:sld xmlns:a="http://schemas.openxmlformats.org/drawingml/2006/main" xmlns:p="http://schemas.openxmlformats.org/presentationml/2006/main" xmlns:r="http://schemas.openxmlformats.org/officeDocument/2006/relationships">
+<p:sld xmlns:a="http://schemas.openxmlformats.org/drawingml/2006/main" xmlns:r="http://schemas.openxmlformats.org/officeDocument/2006/relationships" xmlns:p="http://schemas.openxmlformats.org/presentationml/2006/main">
   <p:cSld>
     <p:bg>
       <p:bgPr>
@@ -3106,7 +3100,14 @@
         <p:cNvGrpSpPr/>
         <p:nvPr/>
       </p:nvGrpSpPr>
-      <p:grpSpPr/>
+      <p:grpSpPr>
+        <a:xfrm>
+          <a:off x="0" y="0"/>
+          <a:ext cx="0" cy="0"/>
+          <a:chOff x="0" y="0"/>
+          <a:chExt cx="0" cy="0"/>
+        </a:xfrm>
+      </p:grpSpPr>
       <p:sp>
         <p:nvSpPr>
           <p:cNvPr id="2" name="Rectangle 1"/>
@@ -3148,6 +3149,7 @@
           <a:lstStyle/>
           <a:p>
             <a:pPr algn="ctr"/>
+            <a:endParaRPr/>
           </a:p>
         </p:txBody>
       </p:sp>
@@ -3192,6 +3194,7 @@
           <a:lstStyle/>
           <a:p>
             <a:pPr algn="ctr"/>
+            <a:endParaRPr/>
           </a:p>
         </p:txBody>
       </p:sp>
@@ -3314,6 +3317,7 @@
           <a:lstStyle/>
           <a:p>
             <a:pPr algn="ctr"/>
+            <a:endParaRPr/>
           </a:p>
         </p:txBody>
       </p:sp>
@@ -3404,7 +3408,7 @@
 </file>
 
 <file path=ppt/slides/slide10.xml><?xml version="1.0" encoding="utf-8"?>
-<p:sld xmlns:a="http://schemas.openxmlformats.org/drawingml/2006/main" xmlns:p="http://schemas.openxmlformats.org/presentationml/2006/main" xmlns:r="http://schemas.openxmlformats.org/officeDocument/2006/relationships">
+<p:sld xmlns:a="http://schemas.openxmlformats.org/drawingml/2006/main" xmlns:r="http://schemas.openxmlformats.org/officeDocument/2006/relationships" xmlns:p="http://schemas.openxmlformats.org/presentationml/2006/main">
   <p:cSld>
     <p:bg>
       <p:bgPr>
@@ -3420,26 +3424,35 @@
         <p:cNvGrpSpPr/>
         <p:nvPr/>
       </p:nvGrpSpPr>
-      <p:grpSpPr/>
-      <p:sp>
-        <p:nvSpPr>
-          <p:cNvPr id="2" name="Rectangle 1"/>
+      <p:grpSpPr>
+        <a:xfrm>
+          <a:off x="0" y="0"/>
+          <a:ext cx="0" cy="0"/>
+          <a:chOff x="0" y="0"/>
+          <a:chExt cx="0" cy="0"/>
+        </a:xfrm>
+      </p:grpSpPr>
+      <p:sp>
+        <p:nvSpPr>
+          <p:cNvPr id="2" name="Rounded Rectangle 1"/>
           <p:cNvSpPr/>
           <p:nvPr/>
         </p:nvSpPr>
         <p:spPr>
           <a:xfrm>
-            <a:off x="0" y="0"/>
-            <a:ext cx="12191695" cy="146304"/>
-          </a:xfrm>
-          <a:prstGeom prst="rect">
+            <a:off x="640080" y="640080"/>
+            <a:ext cx="10908792" cy="5577840"/>
+          </a:xfrm>
+          <a:prstGeom prst="roundRect">
             <a:avLst/>
           </a:prstGeom>
           <a:solidFill>
-            <a:srgbClr val="C84B31"/>
+            <a:srgbClr val="FFFFFF"/>
           </a:solidFill>
-          <a:ln>
-            <a:noFill/>
+          <a:ln w="15240">
+            <a:solidFill>
+              <a:srgbClr val="EADDC8"/>
+            </a:solidFill>
           </a:ln>
           <a:effectLst/>
         </p:spPr>
@@ -3462,97 +3475,20 @@
           <a:lstStyle/>
           <a:p>
             <a:pPr algn="ctr"/>
-          </a:p>
-        </p:txBody>
-      </p:sp>
-      <p:sp>
-        <p:nvSpPr>
-          <p:cNvPr id="3" name="TextBox 2"/>
-          <p:cNvSpPr txBox="1"/>
-          <p:nvPr/>
-        </p:nvSpPr>
-        <p:spPr>
-          <a:xfrm>
-            <a:off x="822960" y="457200"/>
-            <a:ext cx="10515600" cy="457200"/>
-          </a:xfrm>
-          <a:prstGeom prst="rect">
-            <a:avLst/>
-          </a:prstGeom>
-          <a:noFill/>
-        </p:spPr>
-        <p:txBody>
-          <a:bodyPr wrap="square" anchor="t">
-            <a:spAutoFit/>
-          </a:bodyPr>
-          <a:lstStyle/>
-          <a:p>
-            <a:pPr algn="l">
-              <a:spcAft>
-                <a:spcPts val="600"/>
-              </a:spcAft>
-            </a:pPr>
-            <a:r>
-              <a:rPr sz="1800" b="1">
-                <a:solidFill>
-                  <a:srgbClr val="C84B31"/>
-                </a:solidFill>
-                <a:latin typeface="Calibri"/>
-              </a:rPr>
-              <a:t>LO QUE AGREGAMOS HOY</a:t>
-            </a:r>
-          </a:p>
-        </p:txBody>
-      </p:sp>
-      <p:sp>
-        <p:nvSpPr>
-          <p:cNvPr id="4" name="TextBox 3"/>
-          <p:cNvSpPr txBox="1"/>
-          <p:nvPr/>
-        </p:nvSpPr>
-        <p:spPr>
-          <a:xfrm>
-            <a:off x="822960" y="914400"/>
-            <a:ext cx="10607040" cy="1005840"/>
-          </a:xfrm>
-          <a:prstGeom prst="rect">
-            <a:avLst/>
-          </a:prstGeom>
-          <a:noFill/>
-        </p:spPr>
-        <p:txBody>
-          <a:bodyPr wrap="square" anchor="t">
-            <a:spAutoFit/>
-          </a:bodyPr>
-          <a:lstStyle/>
-          <a:p>
-            <a:pPr algn="l">
-              <a:spcAft>
-                <a:spcPts val="600"/>
-              </a:spcAft>
-            </a:pPr>
-            <a:r>
-              <a:rPr sz="3800" b="1">
-                <a:solidFill>
-                  <a:srgbClr val="6D2E46"/>
-                </a:solidFill>
-                <a:latin typeface="Calibri"/>
-              </a:rPr>
-              <a:t>Lista y detalle en Ruta del Café</a:t>
-            </a:r>
-          </a:p>
-        </p:txBody>
-      </p:sp>
-      <p:sp>
-        <p:nvSpPr>
-          <p:cNvPr id="5" name="Rectangle 4"/>
+            <a:endParaRPr/>
+          </a:p>
+        </p:txBody>
+      </p:sp>
+      <p:sp>
+        <p:nvSpPr>
+          <p:cNvPr id="3" name="Rectangle 2"/>
           <p:cNvSpPr/>
           <p:nvPr/>
         </p:nvSpPr>
         <p:spPr>
           <a:xfrm>
-            <a:off x="868680" y="1783080"/>
-            <a:ext cx="1554480" cy="64008"/>
+            <a:off x="640080" y="640080"/>
+            <a:ext cx="201168" cy="5577840"/>
           </a:xfrm>
           <a:prstGeom prst="rect">
             <a:avLst/>
@@ -3584,89 +3520,20 @@
           <a:lstStyle/>
           <a:p>
             <a:pPr algn="ctr"/>
-          </a:p>
-        </p:txBody>
-      </p:sp>
-      <p:sp>
-        <p:nvSpPr>
-          <p:cNvPr id="6" name="Rounded Rectangle 5"/>
-          <p:cNvSpPr/>
-          <p:nvPr/>
-        </p:nvSpPr>
-        <p:spPr>
-          <a:xfrm>
-            <a:off x="3657801" y="1956816"/>
-            <a:ext cx="1989990" cy="4178808"/>
-          </a:xfrm>
-          <a:prstGeom prst="roundRect">
-            <a:avLst/>
-          </a:prstGeom>
-          <a:solidFill>
-            <a:srgbClr val="FFFFFF"/>
-          </a:solidFill>
-          <a:ln w="15240">
-            <a:solidFill>
-              <a:srgbClr val="6D2E46"/>
-            </a:solidFill>
-          </a:ln>
-          <a:effectLst/>
-        </p:spPr>
-        <p:style>
-          <a:lnRef idx="1">
-            <a:schemeClr val="accent1"/>
-          </a:lnRef>
-          <a:fillRef idx="3">
-            <a:schemeClr val="accent1"/>
-          </a:fillRef>
-          <a:effectRef idx="2">
-            <a:schemeClr val="accent1"/>
-          </a:effectRef>
-          <a:fontRef idx="minor">
-            <a:schemeClr val="lt1"/>
-          </a:fontRef>
-        </p:style>
-        <p:txBody>
-          <a:bodyPr rtlCol="0" anchor="ctr"/>
-          <a:lstStyle/>
-          <a:p>
-            <a:pPr algn="ctr"/>
-          </a:p>
-        </p:txBody>
-      </p:sp>
-      <p:pic>
-        <p:nvPicPr>
-          <p:cNvPr id="7" name="Picture 6" descr="ruta-home.png"/>
-          <p:cNvPicPr>
-            <a:picLocks noChangeAspect="1"/>
-          </p:cNvPicPr>
-          <p:nvPr/>
-        </p:nvPicPr>
-        <p:blipFill>
-          <a:blip r:embed="rId2"/>
-          <a:stretch>
-            <a:fillRect/>
-          </a:stretch>
-        </p:blipFill>
-        <p:spPr>
-          <a:xfrm>
-            <a:off x="3712665" y="2011680"/>
-            <a:ext cx="1880262" cy="4069080"/>
-          </a:xfrm>
-          <a:prstGeom prst="rect">
-            <a:avLst/>
-          </a:prstGeom>
-        </p:spPr>
-      </p:pic>
-      <p:sp>
-        <p:nvSpPr>
-          <p:cNvPr id="8" name="TextBox 7"/>
+            <a:endParaRPr/>
+          </a:p>
+        </p:txBody>
+      </p:sp>
+      <p:sp>
+        <p:nvSpPr>
+          <p:cNvPr id="4" name="TextBox 3"/>
           <p:cNvSpPr txBox="1"/>
           <p:nvPr/>
         </p:nvSpPr>
         <p:spPr>
           <a:xfrm>
-            <a:off x="2889705" y="6208776"/>
-            <a:ext cx="3526182" cy="457200"/>
+            <a:off x="1051560" y="960120"/>
+            <a:ext cx="10058400" cy="457200"/>
           </a:xfrm>
           <a:prstGeom prst="rect">
             <a:avLst/>
@@ -3679,103 +3546,33 @@
           </a:bodyPr>
           <a:lstStyle/>
           <a:p>
-            <a:pPr algn="ctr">
+            <a:pPr algn="l">
               <a:spcAft>
                 <a:spcPts val="600"/>
               </a:spcAft>
             </a:pPr>
             <a:r>
-              <a:rPr sz="1300" b="1">
-                <a:solidFill>
-                  <a:srgbClr val="6D2E46"/>
-                </a:solidFill>
-                <a:latin typeface="Calibri"/>
-              </a:rPr>
-              <a:t>Lista con filtro</a:t>
-            </a:r>
-          </a:p>
-        </p:txBody>
-      </p:sp>
-      <p:sp>
-        <p:nvSpPr>
-          <p:cNvPr id="9" name="Rounded Rectangle 8"/>
-          <p:cNvSpPr/>
-          <p:nvPr/>
-        </p:nvSpPr>
-        <p:spPr>
-          <a:xfrm>
-            <a:off x="6543903" y="1956816"/>
-            <a:ext cx="1989990" cy="4178808"/>
-          </a:xfrm>
-          <a:prstGeom prst="roundRect">
-            <a:avLst/>
-          </a:prstGeom>
-          <a:solidFill>
-            <a:srgbClr val="FFFFFF"/>
-          </a:solidFill>
-          <a:ln w="15240">
-            <a:solidFill>
-              <a:srgbClr val="6D2E46"/>
-            </a:solidFill>
-          </a:ln>
-          <a:effectLst/>
-        </p:spPr>
-        <p:style>
-          <a:lnRef idx="1">
-            <a:schemeClr val="accent1"/>
-          </a:lnRef>
-          <a:fillRef idx="3">
-            <a:schemeClr val="accent1"/>
-          </a:fillRef>
-          <a:effectRef idx="2">
-            <a:schemeClr val="accent1"/>
-          </a:effectRef>
-          <a:fontRef idx="minor">
-            <a:schemeClr val="lt1"/>
-          </a:fontRef>
-        </p:style>
-        <p:txBody>
-          <a:bodyPr rtlCol="0" anchor="ctr"/>
-          <a:lstStyle/>
-          <a:p>
-            <a:pPr algn="ctr"/>
-          </a:p>
-        </p:txBody>
-      </p:sp>
-      <p:pic>
-        <p:nvPicPr>
-          <p:cNvPr id="10" name="Picture 9" descr="ruta-detalle.png"/>
-          <p:cNvPicPr>
-            <a:picLocks noChangeAspect="1"/>
-          </p:cNvPicPr>
-          <p:nvPr/>
-        </p:nvPicPr>
-        <p:blipFill>
-          <a:blip r:embed="rId3"/>
-          <a:stretch>
-            <a:fillRect/>
-          </a:stretch>
-        </p:blipFill>
-        <p:spPr>
-          <a:xfrm>
-            <a:off x="6598767" y="2011680"/>
-            <a:ext cx="1880262" cy="4069080"/>
-          </a:xfrm>
-          <a:prstGeom prst="rect">
-            <a:avLst/>
-          </a:prstGeom>
-        </p:spPr>
-      </p:pic>
-      <p:sp>
-        <p:nvSpPr>
-          <p:cNvPr id="11" name="TextBox 10"/>
+              <a:rPr sz="2000" b="1">
+                <a:solidFill>
+                  <a:srgbClr val="C84B31"/>
+                </a:solidFill>
+                <a:latin typeface="Calibri"/>
+              </a:rPr>
+              <a:t>LABORATORIO DE HOY</a:t>
+            </a:r>
+          </a:p>
+        </p:txBody>
+      </p:sp>
+      <p:sp>
+        <p:nvSpPr>
+          <p:cNvPr id="5" name="TextBox 4"/>
           <p:cNvSpPr txBox="1"/>
           <p:nvPr/>
         </p:nvSpPr>
         <p:spPr>
           <a:xfrm>
-            <a:off x="5775807" y="6208776"/>
-            <a:ext cx="3526182" cy="457200"/>
+            <a:off x="1051560" y="1463040"/>
+            <a:ext cx="10058400" cy="914400"/>
           </a:xfrm>
           <a:prstGeom prst="rect">
             <a:avLst/>
@@ -3788,19 +3585,122 @@
           </a:bodyPr>
           <a:lstStyle/>
           <a:p>
-            <a:pPr algn="ctr">
+            <a:pPr algn="l">
               <a:spcAft>
                 <a:spcPts val="600"/>
               </a:spcAft>
             </a:pPr>
             <a:r>
-              <a:rPr sz="1300" b="1">
+              <a:rPr sz="3400" b="1">
                 <a:solidFill>
                   <a:srgbClr val="6D2E46"/>
                 </a:solidFill>
                 <a:latin typeface="Calibri"/>
               </a:rPr>
-              <a:t>Vista de detalle</a:t>
+              <a:t>Laboratorio 2 — Prototipo navegable</a:t>
+            </a:r>
+          </a:p>
+        </p:txBody>
+      </p:sp>
+      <p:sp>
+        <p:nvSpPr>
+          <p:cNvPr id="6" name="TextBox 5"/>
+          <p:cNvSpPr txBox="1"/>
+          <p:nvPr/>
+        </p:nvSpPr>
+        <p:spPr>
+          <a:xfrm>
+            <a:off x="1097280" y="2606040"/>
+            <a:ext cx="9875520" cy="3383280"/>
+          </a:xfrm>
+          <a:prstGeom prst="rect">
+            <a:avLst/>
+          </a:prstGeom>
+          <a:noFill/>
+        </p:spPr>
+        <p:txBody>
+          <a:bodyPr wrap="square">
+            <a:spAutoFit/>
+          </a:bodyPr>
+          <a:lstStyle/>
+          <a:p>
+            <a:pPr>
+              <a:spcAft>
+                <a:spcPts val="1500"/>
+              </a:spcAft>
+            </a:pPr>
+            <a:r>
+              <a:rPr sz="2300">
+                <a:solidFill>
+                  <a:srgbClr val="2B2B2B"/>
+                </a:solidFill>
+                <a:latin typeface="Calibri"/>
+              </a:rPr>
+              <a:t>•  Guarda un checkpoint antes de refinar</a:t>
+            </a:r>
+          </a:p>
+          <a:p>
+            <a:pPr>
+              <a:spcAft>
+                <a:spcPts val="1500"/>
+              </a:spcAft>
+            </a:pPr>
+            <a:r>
+              <a:rPr sz="2300">
+                <a:solidFill>
+                  <a:srgbClr val="2B2B2B"/>
+                </a:solidFill>
+                <a:latin typeface="Calibri"/>
+              </a:rPr>
+              <a:t>•  Agrega el filtro por categoría (con "Todas")</a:t>
+            </a:r>
+          </a:p>
+          <a:p>
+            <a:pPr>
+              <a:spcAft>
+                <a:spcPts val="1500"/>
+              </a:spcAft>
+            </a:pPr>
+            <a:r>
+              <a:rPr sz="2300">
+                <a:solidFill>
+                  <a:srgbClr val="2B2B2B"/>
+                </a:solidFill>
+                <a:latin typeface="Calibri"/>
+              </a:rPr>
+              <a:t>•  Agrega la vista de detalle con botón "Volver"</a:t>
+            </a:r>
+          </a:p>
+          <a:p>
+            <a:pPr>
+              <a:spcAft>
+                <a:spcPts val="1500"/>
+              </a:spcAft>
+            </a:pPr>
+            <a:r>
+              <a:rPr sz="2300">
+                <a:solidFill>
+                  <a:srgbClr val="2B2B2B"/>
+                </a:solidFill>
+                <a:latin typeface="Calibri"/>
+              </a:rPr>
+              <a:t>•  Aplica tu propia identidad visual (Tarea 2)</a:t>
+            </a:r>
+          </a:p>
+          <a:p>
+            <a:pPr>
+              <a:spcAft>
+                <a:spcPts val="1500"/>
+              </a:spcAft>
+            </a:pPr>
+            <a:r>
+              <a:rPr sz="2300">
+                <a:solidFill>
+                  <a:srgbClr val="2B2B2B"/>
+                </a:solidFill>
+                <a:latin typeface="Calibri"/>
+              </a:rPr>
+              <a:t>•  Pule un detalle con el modo de anotación</a:t>
             </a:r>
           </a:p>
         </p:txBody>
@@ -3814,7 +3714,7 @@
 </file>
 
 <file path=ppt/slides/slide11.xml><?xml version="1.0" encoding="utf-8"?>
-<p:sld xmlns:a="http://schemas.openxmlformats.org/drawingml/2006/main" xmlns:p="http://schemas.openxmlformats.org/presentationml/2006/main" xmlns:r="http://schemas.openxmlformats.org/officeDocument/2006/relationships">
+<p:sld xmlns:a="http://schemas.openxmlformats.org/drawingml/2006/main" xmlns:r="http://schemas.openxmlformats.org/officeDocument/2006/relationships" xmlns:p="http://schemas.openxmlformats.org/presentationml/2006/main">
   <p:cSld>
     <p:bg>
       <p:bgPr>
@@ -3830,28 +3730,33 @@
         <p:cNvGrpSpPr/>
         <p:nvPr/>
       </p:nvGrpSpPr>
-      <p:grpSpPr/>
-      <p:sp>
-        <p:nvSpPr>
-          <p:cNvPr id="2" name="Rounded Rectangle 1"/>
+      <p:grpSpPr>
+        <a:xfrm>
+          <a:off x="0" y="0"/>
+          <a:ext cx="0" cy="0"/>
+          <a:chOff x="0" y="0"/>
+          <a:chExt cx="0" cy="0"/>
+        </a:xfrm>
+      </p:grpSpPr>
+      <p:sp>
+        <p:nvSpPr>
+          <p:cNvPr id="2" name="Rectangle 1"/>
           <p:cNvSpPr/>
           <p:nvPr/>
         </p:nvSpPr>
         <p:spPr>
           <a:xfrm>
-            <a:off x="640080" y="640080"/>
-            <a:ext cx="10908792" cy="5577840"/>
-          </a:xfrm>
-          <a:prstGeom prst="roundRect">
+            <a:off x="0" y="0"/>
+            <a:ext cx="12191695" cy="146304"/>
+          </a:xfrm>
+          <a:prstGeom prst="rect">
             <a:avLst/>
           </a:prstGeom>
           <a:solidFill>
-            <a:srgbClr val="FFFFFF"/>
+            <a:srgbClr val="6D2E46"/>
           </a:solidFill>
-          <a:ln w="15240">
-            <a:solidFill>
-              <a:srgbClr val="EADDC8"/>
-            </a:solidFill>
+          <a:ln>
+            <a:noFill/>
           </a:ln>
           <a:effectLst/>
         </p:spPr>
@@ -3874,19 +3779,98 @@
           <a:lstStyle/>
           <a:p>
             <a:pPr algn="ctr"/>
-          </a:p>
-        </p:txBody>
-      </p:sp>
-      <p:sp>
-        <p:nvSpPr>
-          <p:cNvPr id="3" name="Rectangle 2"/>
+            <a:endParaRPr/>
+          </a:p>
+        </p:txBody>
+      </p:sp>
+      <p:sp>
+        <p:nvSpPr>
+          <p:cNvPr id="3" name="TextBox 2"/>
+          <p:cNvSpPr txBox="1"/>
+          <p:nvPr/>
+        </p:nvSpPr>
+        <p:spPr>
+          <a:xfrm>
+            <a:off x="822960" y="457200"/>
+            <a:ext cx="10515600" cy="457200"/>
+          </a:xfrm>
+          <a:prstGeom prst="rect">
+            <a:avLst/>
+          </a:prstGeom>
+          <a:noFill/>
+        </p:spPr>
+        <p:txBody>
+          <a:bodyPr wrap="square" anchor="t">
+            <a:spAutoFit/>
+          </a:bodyPr>
+          <a:lstStyle/>
+          <a:p>
+            <a:pPr algn="l">
+              <a:spcAft>
+                <a:spcPts val="600"/>
+              </a:spcAft>
+            </a:pPr>
+            <a:r>
+              <a:rPr sz="1800" b="1">
+                <a:solidFill>
+                  <a:srgbClr val="C84B31"/>
+                </a:solidFill>
+                <a:latin typeface="Calibri"/>
+              </a:rPr>
+              <a:t>CIERRE</a:t>
+            </a:r>
+          </a:p>
+        </p:txBody>
+      </p:sp>
+      <p:sp>
+        <p:nvSpPr>
+          <p:cNvPr id="4" name="TextBox 3"/>
+          <p:cNvSpPr txBox="1"/>
+          <p:nvPr/>
+        </p:nvSpPr>
+        <p:spPr>
+          <a:xfrm>
+            <a:off x="822960" y="914400"/>
+            <a:ext cx="10515600" cy="822960"/>
+          </a:xfrm>
+          <a:prstGeom prst="rect">
+            <a:avLst/>
+          </a:prstGeom>
+          <a:noFill/>
+        </p:spPr>
+        <p:txBody>
+          <a:bodyPr wrap="square" anchor="t">
+            <a:spAutoFit/>
+          </a:bodyPr>
+          <a:lstStyle/>
+          <a:p>
+            <a:pPr algn="l">
+              <a:spcAft>
+                <a:spcPts val="600"/>
+              </a:spcAft>
+            </a:pPr>
+            <a:r>
+              <a:rPr sz="3600" b="1">
+                <a:solidFill>
+                  <a:srgbClr val="6D2E46"/>
+                </a:solidFill>
+                <a:latin typeface="Calibri"/>
+              </a:rPr>
+              <a:t>Lo que nos llevamos y la tarea</a:t>
+            </a:r>
+          </a:p>
+        </p:txBody>
+      </p:sp>
+      <p:sp>
+        <p:nvSpPr>
+          <p:cNvPr id="5" name="Rectangle 4"/>
           <p:cNvSpPr/>
           <p:nvPr/>
         </p:nvSpPr>
         <p:spPr>
           <a:xfrm>
-            <a:off x="640080" y="640080"/>
-            <a:ext cx="201168" cy="5577840"/>
+            <a:off x="868680" y="1783080"/>
+            <a:ext cx="1554480" cy="64008"/>
           </a:xfrm>
           <a:prstGeom prst="rect">
             <a:avLst/>
@@ -3918,19 +3902,65 @@
           <a:lstStyle/>
           <a:p>
             <a:pPr algn="ctr"/>
-          </a:p>
-        </p:txBody>
-      </p:sp>
-      <p:sp>
-        <p:nvSpPr>
-          <p:cNvPr id="4" name="TextBox 3"/>
+            <a:endParaRPr/>
+          </a:p>
+        </p:txBody>
+      </p:sp>
+      <p:sp>
+        <p:nvSpPr>
+          <p:cNvPr id="6" name="Rounded Rectangle 5"/>
+          <p:cNvSpPr/>
+          <p:nvPr/>
+        </p:nvSpPr>
+        <p:spPr>
+          <a:xfrm>
+            <a:off x="822960" y="2148840"/>
+            <a:ext cx="5257800" cy="4160520"/>
+          </a:xfrm>
+          <a:prstGeom prst="roundRect">
+            <a:avLst/>
+          </a:prstGeom>
+          <a:solidFill>
+            <a:srgbClr val="F6ECDD"/>
+          </a:solidFill>
+          <a:ln>
+            <a:noFill/>
+          </a:ln>
+          <a:effectLst/>
+        </p:spPr>
+        <p:style>
+          <a:lnRef idx="1">
+            <a:schemeClr val="accent1"/>
+          </a:lnRef>
+          <a:fillRef idx="3">
+            <a:schemeClr val="accent1"/>
+          </a:fillRef>
+          <a:effectRef idx="2">
+            <a:schemeClr val="accent1"/>
+          </a:effectRef>
+          <a:fontRef idx="minor">
+            <a:schemeClr val="lt1"/>
+          </a:fontRef>
+        </p:style>
+        <p:txBody>
+          <a:bodyPr rtlCol="0" anchor="ctr"/>
+          <a:lstStyle/>
+          <a:p>
+            <a:pPr algn="ctr"/>
+            <a:endParaRPr/>
+          </a:p>
+        </p:txBody>
+      </p:sp>
+      <p:sp>
+        <p:nvSpPr>
+          <p:cNvPr id="7" name="TextBox 6"/>
           <p:cNvSpPr txBox="1"/>
           <p:nvPr/>
         </p:nvSpPr>
         <p:spPr>
           <a:xfrm>
-            <a:off x="1051560" y="960120"/>
-            <a:ext cx="10058400" cy="457200"/>
+            <a:off x="1097280" y="2377440"/>
+            <a:ext cx="4754880" cy="457200"/>
           </a:xfrm>
           <a:prstGeom prst="rect">
             <a:avLst/>
@@ -3949,27 +3979,143 @@
               </a:spcAft>
             </a:pPr>
             <a:r>
-              <a:rPr sz="2000" b="1">
-                <a:solidFill>
-                  <a:srgbClr val="C84B31"/>
-                </a:solidFill>
-                <a:latin typeface="Calibri"/>
-              </a:rPr>
-              <a:t>LABORATORIO DE HOY</a:t>
-            </a:r>
-          </a:p>
-        </p:txBody>
-      </p:sp>
-      <p:sp>
-        <p:nvSpPr>
-          <p:cNvPr id="5" name="TextBox 4"/>
+              <a:rPr sz="2200" b="1">
+                <a:solidFill>
+                  <a:srgbClr val="4F772D"/>
+                </a:solidFill>
+                <a:latin typeface="Calibri"/>
+              </a:rPr>
+              <a:t>En resumen</a:t>
+            </a:r>
+          </a:p>
+        </p:txBody>
+      </p:sp>
+      <p:sp>
+        <p:nvSpPr>
+          <p:cNvPr id="8" name="TextBox 7"/>
           <p:cNvSpPr txBox="1"/>
           <p:nvPr/>
         </p:nvSpPr>
         <p:spPr>
           <a:xfrm>
-            <a:off x="1051560" y="1463040"/>
-            <a:ext cx="10058400" cy="914400"/>
+            <a:off x="1097280" y="2926080"/>
+            <a:ext cx="4754880" cy="3291840"/>
+          </a:xfrm>
+          <a:prstGeom prst="rect">
+            <a:avLst/>
+          </a:prstGeom>
+          <a:noFill/>
+        </p:spPr>
+        <p:txBody>
+          <a:bodyPr wrap="square">
+            <a:spAutoFit/>
+          </a:bodyPr>
+          <a:lstStyle/>
+          <a:p>
+            <a:pPr>
+              <a:spcAft>
+                <a:spcPts val="1300"/>
+              </a:spcAft>
+            </a:pPr>
+            <a:r>
+              <a:rPr sz="2000">
+                <a:solidFill>
+                  <a:srgbClr val="2B2B2B"/>
+                </a:solidFill>
+                <a:latin typeface="Calibri"/>
+              </a:rPr>
+              <a:t>•  Un prototipo navegable se puede tocar de verdad</a:t>
+            </a:r>
+          </a:p>
+          <a:p>
+            <a:pPr>
+              <a:spcAft>
+                <a:spcPts val="1300"/>
+              </a:spcAft>
+            </a:pPr>
+            <a:r>
+              <a:rPr sz="2000">
+                <a:solidFill>
+                  <a:srgbClr val="2B2B2B"/>
+                </a:solidFill>
+                <a:latin typeface="Calibri"/>
+              </a:rPr>
+              <a:t>•  La identidad visual es un sistema, no un color suelto</a:t>
+            </a:r>
+          </a:p>
+          <a:p>
+            <a:pPr>
+              <a:spcAft>
+                <a:spcPts val="1300"/>
+              </a:spcAft>
+            </a:pPr>
+            <a:r>
+              <a:rPr sz="2000">
+                <a:solidFill>
+                  <a:srgbClr val="2B2B2B"/>
+                </a:solidFill>
+                <a:latin typeface="Calibri"/>
+              </a:rPr>
+              <a:t>•  Imágenes: Nano Banana en el playground; anotación para precisión</a:t>
+            </a:r>
+          </a:p>
+        </p:txBody>
+      </p:sp>
+      <p:sp>
+        <p:nvSpPr>
+          <p:cNvPr id="9" name="Rounded Rectangle 8"/>
+          <p:cNvSpPr/>
+          <p:nvPr/>
+        </p:nvSpPr>
+        <p:spPr>
+          <a:xfrm>
+            <a:off x="6263640" y="2148840"/>
+            <a:ext cx="5120640" cy="4160520"/>
+          </a:xfrm>
+          <a:prstGeom prst="roundRect">
+            <a:avLst/>
+          </a:prstGeom>
+          <a:solidFill>
+            <a:srgbClr val="F6ECDD"/>
+          </a:solidFill>
+          <a:ln>
+            <a:noFill/>
+          </a:ln>
+          <a:effectLst/>
+        </p:spPr>
+        <p:style>
+          <a:lnRef idx="1">
+            <a:schemeClr val="accent1"/>
+          </a:lnRef>
+          <a:fillRef idx="3">
+            <a:schemeClr val="accent1"/>
+          </a:fillRef>
+          <a:effectRef idx="2">
+            <a:schemeClr val="accent1"/>
+          </a:effectRef>
+          <a:fontRef idx="minor">
+            <a:schemeClr val="lt1"/>
+          </a:fontRef>
+        </p:style>
+        <p:txBody>
+          <a:bodyPr rtlCol="0" anchor="ctr"/>
+          <a:lstStyle/>
+          <a:p>
+            <a:pPr algn="ctr"/>
+            <a:endParaRPr/>
+          </a:p>
+        </p:txBody>
+      </p:sp>
+      <p:sp>
+        <p:nvSpPr>
+          <p:cNvPr id="10" name="TextBox 9"/>
+          <p:cNvSpPr txBox="1"/>
+          <p:nvPr/>
+        </p:nvSpPr>
+        <p:spPr>
+          <a:xfrm>
+            <a:off x="6537960" y="2377440"/>
+            <a:ext cx="4572000" cy="457200"/>
           </a:xfrm>
           <a:prstGeom prst="rect">
             <a:avLst/>
@@ -3988,27 +4134,27 @@
               </a:spcAft>
             </a:pPr>
             <a:r>
-              <a:rPr sz="3400" b="1">
-                <a:solidFill>
-                  <a:srgbClr val="6D2E46"/>
-                </a:solidFill>
-                <a:latin typeface="Calibri"/>
-              </a:rPr>
-              <a:t>Laboratorio 2 — Prototipo navegable</a:t>
-            </a:r>
-          </a:p>
-        </p:txBody>
-      </p:sp>
-      <p:sp>
-        <p:nvSpPr>
-          <p:cNvPr id="6" name="TextBox 5"/>
+              <a:rPr sz="2200" b="1">
+                <a:solidFill>
+                  <a:srgbClr val="C84B31"/>
+                </a:solidFill>
+                <a:latin typeface="Calibri"/>
+              </a:rPr>
+              <a:t>Para la próxima</a:t>
+            </a:r>
+          </a:p>
+        </p:txBody>
+      </p:sp>
+      <p:sp>
+        <p:nvSpPr>
+          <p:cNvPr id="11" name="TextBox 10"/>
           <p:cNvSpPr txBox="1"/>
           <p:nvPr/>
         </p:nvSpPr>
         <p:spPr>
           <a:xfrm>
-            <a:off x="1097280" y="2606040"/>
-            <a:ext cx="9875520" cy="3383280"/>
+            <a:off x="6537960" y="2926080"/>
+            <a:ext cx="4572000" cy="3291840"/>
           </a:xfrm>
           <a:prstGeom prst="rect">
             <a:avLst/>
@@ -4023,81 +4169,49 @@
           <a:p>
             <a:pPr>
               <a:spcAft>
-                <a:spcPts val="1500"/>
+                <a:spcPts val="1300"/>
               </a:spcAft>
             </a:pPr>
             <a:r>
-              <a:rPr sz="2300">
+              <a:rPr sz="2000">
                 <a:solidFill>
                   <a:srgbClr val="2B2B2B"/>
                 </a:solidFill>
                 <a:latin typeface="Calibri"/>
               </a:rPr>
-              <a:t>•  Guarda un checkpoint antes de refinar</a:t>
+              <a:t>•  Tarea 2: define la identidad visual de tu app</a:t>
             </a:r>
           </a:p>
           <a:p>
             <a:pPr>
               <a:spcAft>
-                <a:spcPts val="1500"/>
+                <a:spcPts val="1300"/>
               </a:spcAft>
             </a:pPr>
             <a:r>
-              <a:rPr sz="2300">
+              <a:rPr sz="2000">
                 <a:solidFill>
                   <a:srgbClr val="2B2B2B"/>
                 </a:solidFill>
                 <a:latin typeface="Calibri"/>
               </a:rPr>
-              <a:t>•  Agrega el filtro por categoría (con "Todas")</a:t>
+              <a:t>•  Laboratorio 2: prototipo navegable con identidad propia</a:t>
             </a:r>
           </a:p>
           <a:p>
             <a:pPr>
               <a:spcAft>
-                <a:spcPts val="1500"/>
+                <a:spcPts val="1300"/>
               </a:spcAft>
             </a:pPr>
             <a:r>
-              <a:rPr sz="2300">
+              <a:rPr sz="2000">
                 <a:solidFill>
                   <a:srgbClr val="2B2B2B"/>
                 </a:solidFill>
                 <a:latin typeface="Calibri"/>
               </a:rPr>
-              <a:t>•  Agrega la vista de detalle con botón "Volver"</a:t>
-            </a:r>
-          </a:p>
-          <a:p>
-            <a:pPr>
-              <a:spcAft>
-                <a:spcPts val="1500"/>
-              </a:spcAft>
-            </a:pPr>
-            <a:r>
-              <a:rPr sz="2300">
-                <a:solidFill>
-                  <a:srgbClr val="2B2B2B"/>
-                </a:solidFill>
-                <a:latin typeface="Calibri"/>
-              </a:rPr>
-              <a:t>•  Aplica tu propia identidad visual (Tarea 2)</a:t>
-            </a:r>
-          </a:p>
-          <a:p>
-            <a:pPr>
-              <a:spcAft>
-                <a:spcPts val="1500"/>
-              </a:spcAft>
-            </a:pPr>
-            <a:r>
-              <a:rPr sz="2300">
-                <a:solidFill>
-                  <a:srgbClr val="2B2B2B"/>
-                </a:solidFill>
-                <a:latin typeface="Calibri"/>
-              </a:rPr>
-              <a:t>•  Pule un detalle con el modo de anotación</a:t>
+              <a:t>•  Reúne referencias de paletas y tipografías</a:t>
             </a:r>
           </a:p>
         </p:txBody>
@@ -4110,8 +4224,8 @@
 </p:sld>
 </file>
 
-<file path=ppt/slides/slide12.xml><?xml version="1.0" encoding="utf-8"?>
-<p:sld xmlns:a="http://schemas.openxmlformats.org/drawingml/2006/main" xmlns:p="http://schemas.openxmlformats.org/presentationml/2006/main" xmlns:r="http://schemas.openxmlformats.org/officeDocument/2006/relationships">
+<file path=ppt/slides/slide2.xml><?xml version="1.0" encoding="utf-8"?>
+<p:sld xmlns:a="http://schemas.openxmlformats.org/drawingml/2006/main" xmlns:r="http://schemas.openxmlformats.org/officeDocument/2006/relationships" xmlns:p="http://schemas.openxmlformats.org/presentationml/2006/main">
   <p:cSld>
     <p:bg>
       <p:bgPr>
@@ -4127,7 +4241,14 @@
         <p:cNvGrpSpPr/>
         <p:nvPr/>
       </p:nvGrpSpPr>
-      <p:grpSpPr/>
+      <p:grpSpPr>
+        <a:xfrm>
+          <a:off x="0" y="0"/>
+          <a:ext cx="0" cy="0"/>
+          <a:chOff x="0" y="0"/>
+          <a:chExt cx="0" cy="0"/>
+        </a:xfrm>
+      </p:grpSpPr>
       <p:sp>
         <p:nvSpPr>
           <p:cNvPr id="2" name="Rectangle 1"/>
@@ -4143,7 +4264,7 @@
             <a:avLst/>
           </a:prstGeom>
           <a:solidFill>
-            <a:srgbClr val="6D2E46"/>
+            <a:srgbClr val="C84B31"/>
           </a:solidFill>
           <a:ln>
             <a:noFill/>
@@ -4169,6 +4290,7 @@
           <a:lstStyle/>
           <a:p>
             <a:pPr algn="ctr"/>
+            <a:endParaRPr/>
           </a:p>
         </p:txBody>
       </p:sp>
@@ -4206,7 +4328,7 @@
                 </a:solidFill>
                 <a:latin typeface="Calibri"/>
               </a:rPr>
-              <a:t>CIERRE</a:t>
+              <a:t>SESIÓN DE HOY</a:t>
             </a:r>
           </a:p>
         </p:txBody>
@@ -4220,7 +4342,7 @@
         <p:spPr>
           <a:xfrm>
             <a:off x="822960" y="914400"/>
-            <a:ext cx="10515600" cy="822960"/>
+            <a:ext cx="10607040" cy="1005840"/>
           </a:xfrm>
           <a:prstGeom prst="rect">
             <a:avLst/>
@@ -4239,13 +4361,13 @@
               </a:spcAft>
             </a:pPr>
             <a:r>
-              <a:rPr sz="3600" b="1">
+              <a:rPr sz="3800" b="1">
                 <a:solidFill>
                   <a:srgbClr val="6D2E46"/>
                 </a:solidFill>
                 <a:latin typeface="Calibri"/>
               </a:rPr>
-              <a:t>Lo que nos llevamos y la tarea</a:t>
+              <a:t>Agenda</a:t>
             </a:r>
           </a:p>
         </p:txBody>
@@ -4291,102 +4413,20 @@
           <a:lstStyle/>
           <a:p>
             <a:pPr algn="ctr"/>
-          </a:p>
-        </p:txBody>
-      </p:sp>
-      <p:sp>
-        <p:nvSpPr>
-          <p:cNvPr id="6" name="Rounded Rectangle 5"/>
-          <p:cNvSpPr/>
-          <p:nvPr/>
-        </p:nvSpPr>
-        <p:spPr>
-          <a:xfrm>
-            <a:off x="822960" y="2148840"/>
-            <a:ext cx="5257800" cy="4160520"/>
-          </a:xfrm>
-          <a:prstGeom prst="roundRect">
-            <a:avLst/>
-          </a:prstGeom>
-          <a:solidFill>
-            <a:srgbClr val="F6ECDD"/>
-          </a:solidFill>
-          <a:ln>
-            <a:noFill/>
-          </a:ln>
-          <a:effectLst/>
-        </p:spPr>
-        <p:style>
-          <a:lnRef idx="1">
-            <a:schemeClr val="accent1"/>
-          </a:lnRef>
-          <a:fillRef idx="3">
-            <a:schemeClr val="accent1"/>
-          </a:fillRef>
-          <a:effectRef idx="2">
-            <a:schemeClr val="accent1"/>
-          </a:effectRef>
-          <a:fontRef idx="minor">
-            <a:schemeClr val="lt1"/>
-          </a:fontRef>
-        </p:style>
-        <p:txBody>
-          <a:bodyPr rtlCol="0" anchor="ctr"/>
-          <a:lstStyle/>
-          <a:p>
-            <a:pPr algn="ctr"/>
-          </a:p>
-        </p:txBody>
-      </p:sp>
-      <p:sp>
-        <p:nvSpPr>
-          <p:cNvPr id="7" name="TextBox 6"/>
+            <a:endParaRPr/>
+          </a:p>
+        </p:txBody>
+      </p:sp>
+      <p:sp>
+        <p:nvSpPr>
+          <p:cNvPr id="6" name="TextBox 5"/>
           <p:cNvSpPr txBox="1"/>
           <p:nvPr/>
         </p:nvSpPr>
         <p:spPr>
           <a:xfrm>
-            <a:off x="1097280" y="2377440"/>
-            <a:ext cx="4754880" cy="457200"/>
-          </a:xfrm>
-          <a:prstGeom prst="rect">
-            <a:avLst/>
-          </a:prstGeom>
-          <a:noFill/>
-        </p:spPr>
-        <p:txBody>
-          <a:bodyPr wrap="square" anchor="t">
-            <a:spAutoFit/>
-          </a:bodyPr>
-          <a:lstStyle/>
-          <a:p>
-            <a:pPr algn="l">
-              <a:spcAft>
-                <a:spcPts val="600"/>
-              </a:spcAft>
-            </a:pPr>
-            <a:r>
-              <a:rPr sz="2200" b="1">
-                <a:solidFill>
-                  <a:srgbClr val="4F772D"/>
-                </a:solidFill>
-                <a:latin typeface="Calibri"/>
-              </a:rPr>
-              <a:t>En resumen</a:t>
-            </a:r>
-          </a:p>
-        </p:txBody>
-      </p:sp>
-      <p:sp>
-        <p:nvSpPr>
-          <p:cNvPr id="8" name="TextBox 7"/>
-          <p:cNvSpPr txBox="1"/>
-          <p:nvPr/>
-        </p:nvSpPr>
-        <p:spPr>
-          <a:xfrm>
-            <a:off x="1097280" y="2926080"/>
-            <a:ext cx="4754880" cy="3291840"/>
+            <a:off x="896112" y="2148840"/>
+            <a:ext cx="10424160" cy="2913618"/>
           </a:xfrm>
           <a:prstGeom prst="rect">
             <a:avLst/>
@@ -4401,204 +4441,214 @@
           <a:p>
             <a:pPr>
               <a:spcAft>
-                <a:spcPts val="1300"/>
+                <a:spcPts val="1600"/>
               </a:spcAft>
             </a:pPr>
             <a:r>
-              <a:rPr sz="2000">
+              <a:rPr sz="2600" dirty="0">
                 <a:solidFill>
                   <a:srgbClr val="2B2B2B"/>
                 </a:solidFill>
                 <a:latin typeface="Calibri"/>
               </a:rPr>
-              <a:t>•  Un prototipo navegable se puede tocar de verdad</a:t>
+              <a:t>●  </a:t>
+            </a:r>
+            <a:r>
+              <a:rPr sz="2600" dirty="0" err="1">
+                <a:solidFill>
+                  <a:srgbClr val="2B2B2B"/>
+                </a:solidFill>
+                <a:latin typeface="Calibri"/>
+              </a:rPr>
+              <a:t>Repaso</a:t>
+            </a:r>
+            <a:r>
+              <a:rPr sz="2600" dirty="0">
+                <a:solidFill>
+                  <a:srgbClr val="2B2B2B"/>
+                </a:solidFill>
+                <a:latin typeface="Calibri"/>
+              </a:rPr>
+              <a:t> de la </a:t>
+            </a:r>
+            <a:r>
+              <a:rPr sz="2600" dirty="0" err="1">
+                <a:solidFill>
+                  <a:srgbClr val="2B2B2B"/>
+                </a:solidFill>
+                <a:latin typeface="Calibri"/>
+              </a:rPr>
+              <a:t>sesión</a:t>
+            </a:r>
+            <a:r>
+              <a:rPr sz="2600" dirty="0">
+                <a:solidFill>
+                  <a:srgbClr val="2B2B2B"/>
+                </a:solidFill>
+                <a:latin typeface="Calibri"/>
+              </a:rPr>
+              <a:t> 1</a:t>
             </a:r>
           </a:p>
           <a:p>
             <a:pPr>
               <a:spcAft>
-                <a:spcPts val="1300"/>
+                <a:spcPts val="1600"/>
               </a:spcAft>
             </a:pPr>
             <a:r>
-              <a:rPr sz="2000">
+              <a:rPr sz="2600" dirty="0">
                 <a:solidFill>
                   <a:srgbClr val="2B2B2B"/>
                 </a:solidFill>
                 <a:latin typeface="Calibri"/>
               </a:rPr>
-              <a:t>•  La identidad visual es un sistema, no un color suelto</a:t>
-            </a:r>
+              <a:t>●  </a:t>
+            </a:r>
+            <a:r>
+              <a:rPr sz="2600" dirty="0" err="1">
+                <a:solidFill>
+                  <a:srgbClr val="2B2B2B"/>
+                </a:solidFill>
+                <a:latin typeface="Calibri"/>
+              </a:rPr>
+              <a:t>Prototipos</a:t>
+            </a:r>
+            <a:r>
+              <a:rPr sz="2600" dirty="0">
+                <a:solidFill>
+                  <a:srgbClr val="2B2B2B"/>
+                </a:solidFill>
+                <a:latin typeface="Calibri"/>
+              </a:rPr>
+              <a:t> </a:t>
+            </a:r>
+            <a:r>
+              <a:rPr sz="2600" dirty="0" err="1">
+                <a:solidFill>
+                  <a:srgbClr val="2B2B2B"/>
+                </a:solidFill>
+                <a:latin typeface="Calibri"/>
+              </a:rPr>
+              <a:t>navegables</a:t>
+            </a:r>
+            <a:endParaRPr sz="2600" dirty="0">
+              <a:solidFill>
+                <a:srgbClr val="2B2B2B"/>
+              </a:solidFill>
+              <a:latin typeface="Calibri"/>
+            </a:endParaRPr>
           </a:p>
           <a:p>
             <a:pPr>
               <a:spcAft>
-                <a:spcPts val="1300"/>
+                <a:spcPts val="1600"/>
               </a:spcAft>
             </a:pPr>
             <a:r>
-              <a:rPr sz="2000">
+              <a:rPr sz="2600" dirty="0">
                 <a:solidFill>
                   <a:srgbClr val="2B2B2B"/>
                 </a:solidFill>
                 <a:latin typeface="Calibri"/>
               </a:rPr>
-              <a:t>•  Imágenes: Nano Banana en el playground; anotación para precisión</a:t>
-            </a:r>
-          </a:p>
-        </p:txBody>
-      </p:sp>
-      <p:sp>
-        <p:nvSpPr>
-          <p:cNvPr id="9" name="Rounded Rectangle 8"/>
-          <p:cNvSpPr/>
-          <p:nvPr/>
-        </p:nvSpPr>
-        <p:spPr>
-          <a:xfrm>
-            <a:off x="6263640" y="2148840"/>
-            <a:ext cx="5120640" cy="4160520"/>
-          </a:xfrm>
-          <a:prstGeom prst="roundRect">
-            <a:avLst/>
-          </a:prstGeom>
-          <a:solidFill>
-            <a:srgbClr val="F6ECDD"/>
-          </a:solidFill>
-          <a:ln>
-            <a:noFill/>
-          </a:ln>
-          <a:effectLst/>
-        </p:spPr>
-        <p:style>
-          <a:lnRef idx="1">
-            <a:schemeClr val="accent1"/>
-          </a:lnRef>
-          <a:fillRef idx="3">
-            <a:schemeClr val="accent1"/>
-          </a:fillRef>
-          <a:effectRef idx="2">
-            <a:schemeClr val="accent1"/>
-          </a:effectRef>
-          <a:fontRef idx="minor">
-            <a:schemeClr val="lt1"/>
-          </a:fontRef>
-        </p:style>
-        <p:txBody>
-          <a:bodyPr rtlCol="0" anchor="ctr"/>
-          <a:lstStyle/>
-          <a:p>
-            <a:pPr algn="ctr"/>
-          </a:p>
-        </p:txBody>
-      </p:sp>
-      <p:sp>
-        <p:nvSpPr>
-          <p:cNvPr id="10" name="TextBox 9"/>
-          <p:cNvSpPr txBox="1"/>
-          <p:nvPr/>
-        </p:nvSpPr>
-        <p:spPr>
-          <a:xfrm>
-            <a:off x="6537960" y="2377440"/>
-            <a:ext cx="4572000" cy="457200"/>
-          </a:xfrm>
-          <a:prstGeom prst="rect">
-            <a:avLst/>
-          </a:prstGeom>
-          <a:noFill/>
-        </p:spPr>
-        <p:txBody>
-          <a:bodyPr wrap="square" anchor="t">
-            <a:spAutoFit/>
-          </a:bodyPr>
-          <a:lstStyle/>
-          <a:p>
-            <a:pPr algn="l">
+              <a:t>●  Identidad visual </a:t>
+            </a:r>
+            <a:r>
+              <a:rPr sz="2600" dirty="0" err="1">
+                <a:solidFill>
+                  <a:srgbClr val="2B2B2B"/>
+                </a:solidFill>
+                <a:latin typeface="Calibri"/>
+              </a:rPr>
+              <a:t>como</a:t>
+            </a:r>
+            <a:r>
+              <a:rPr sz="2600" dirty="0">
+                <a:solidFill>
+                  <a:srgbClr val="2B2B2B"/>
+                </a:solidFill>
+                <a:latin typeface="Calibri"/>
+              </a:rPr>
+              <a:t> </a:t>
+            </a:r>
+            <a:r>
+              <a:rPr sz="2600" dirty="0" err="1">
+                <a:solidFill>
+                  <a:srgbClr val="2B2B2B"/>
+                </a:solidFill>
+                <a:latin typeface="Calibri"/>
+              </a:rPr>
+              <a:t>sistema</a:t>
+            </a:r>
+            <a:endParaRPr sz="2600" dirty="0">
+              <a:solidFill>
+                <a:srgbClr val="2B2B2B"/>
+              </a:solidFill>
+              <a:latin typeface="Calibri"/>
+            </a:endParaRPr>
+          </a:p>
+          <a:p>
+            <a:pPr>
               <a:spcAft>
-                <a:spcPts val="600"/>
+                <a:spcPts val="1600"/>
               </a:spcAft>
             </a:pPr>
             <a:r>
-              <a:rPr sz="2200" b="1">
-                <a:solidFill>
-                  <a:srgbClr val="C84B31"/>
-                </a:solidFill>
-                <a:latin typeface="Calibri"/>
-              </a:rPr>
-              <a:t>Para la próxima</a:t>
-            </a:r>
-          </a:p>
-        </p:txBody>
-      </p:sp>
-      <p:sp>
-        <p:nvSpPr>
-          <p:cNvPr id="11" name="TextBox 10"/>
-          <p:cNvSpPr txBox="1"/>
-          <p:nvPr/>
-        </p:nvSpPr>
-        <p:spPr>
-          <a:xfrm>
-            <a:off x="6537960" y="2926080"/>
-            <a:ext cx="4572000" cy="3291840"/>
-          </a:xfrm>
-          <a:prstGeom prst="rect">
-            <a:avLst/>
-          </a:prstGeom>
-          <a:noFill/>
-        </p:spPr>
-        <p:txBody>
-          <a:bodyPr wrap="square">
-            <a:spAutoFit/>
-          </a:bodyPr>
-          <a:lstStyle/>
+              <a:rPr sz="2600" dirty="0">
+                <a:solidFill>
+                  <a:srgbClr val="2B2B2B"/>
+                </a:solidFill>
+                <a:latin typeface="Calibri"/>
+              </a:rPr>
+              <a:t>●  Modo de </a:t>
+            </a:r>
+            <a:r>
+              <a:rPr sz="2600" dirty="0" err="1">
+                <a:solidFill>
+                  <a:srgbClr val="2B2B2B"/>
+                </a:solidFill>
+                <a:latin typeface="Calibri"/>
+              </a:rPr>
+              <a:t>anotación</a:t>
+            </a:r>
+            <a:endParaRPr sz="2600" dirty="0">
+              <a:solidFill>
+                <a:srgbClr val="2B2B2B"/>
+              </a:solidFill>
+              <a:latin typeface="Calibri"/>
+            </a:endParaRPr>
+          </a:p>
           <a:p>
             <a:pPr>
               <a:spcAft>
-                <a:spcPts val="1300"/>
+                <a:spcPts val="1600"/>
               </a:spcAft>
             </a:pPr>
             <a:r>
-              <a:rPr sz="2000">
+              <a:rPr sz="2600" dirty="0">
                 <a:solidFill>
                   <a:srgbClr val="2B2B2B"/>
                 </a:solidFill>
                 <a:latin typeface="Calibri"/>
               </a:rPr>
-              <a:t>•  Tarea 2: define la identidad visual de tu app</a:t>
-            </a:r>
-          </a:p>
-          <a:p>
-            <a:pPr>
-              <a:spcAft>
-                <a:spcPts val="1300"/>
-              </a:spcAft>
-            </a:pPr>
-            <a:r>
-              <a:rPr sz="2000">
+              <a:t>●  Laboratorio 2 y </a:t>
+            </a:r>
+            <a:r>
+              <a:rPr sz="2600" dirty="0" err="1">
                 <a:solidFill>
                   <a:srgbClr val="2B2B2B"/>
                 </a:solidFill>
                 <a:latin typeface="Calibri"/>
               </a:rPr>
-              <a:t>•  Laboratorio 2: prototipo navegable con identidad propia</a:t>
-            </a:r>
-          </a:p>
-          <a:p>
-            <a:pPr>
-              <a:spcAft>
-                <a:spcPts val="1300"/>
-              </a:spcAft>
-            </a:pPr>
-            <a:r>
-              <a:rPr sz="2000">
-                <a:solidFill>
-                  <a:srgbClr val="2B2B2B"/>
-                </a:solidFill>
-                <a:latin typeface="Calibri"/>
-              </a:rPr>
-              <a:t>•  Reúne referencias de paletas y tipografías</a:t>
-            </a:r>
+              <a:t>tarea</a:t>
+            </a:r>
+            <a:endParaRPr sz="2600" dirty="0">
+              <a:solidFill>
+                <a:srgbClr val="2B2B2B"/>
+              </a:solidFill>
+              <a:latin typeface="Calibri"/>
+            </a:endParaRPr>
           </a:p>
         </p:txBody>
       </p:sp>
@@ -4610,8 +4660,8 @@
 </p:sld>
 </file>
 
-<file path=ppt/slides/slide2.xml><?xml version="1.0" encoding="utf-8"?>
-<p:sld xmlns:a="http://schemas.openxmlformats.org/drawingml/2006/main" xmlns:p="http://schemas.openxmlformats.org/presentationml/2006/main" xmlns:r="http://schemas.openxmlformats.org/officeDocument/2006/relationships">
+<file path=ppt/slides/slide3.xml><?xml version="1.0" encoding="utf-8"?>
+<p:sld xmlns:a="http://schemas.openxmlformats.org/drawingml/2006/main" xmlns:r="http://schemas.openxmlformats.org/officeDocument/2006/relationships" xmlns:p="http://schemas.openxmlformats.org/presentationml/2006/main">
   <p:cSld>
     <p:bg>
       <p:bgPr>
@@ -4627,7 +4677,14 @@
         <p:cNvGrpSpPr/>
         <p:nvPr/>
       </p:nvGrpSpPr>
-      <p:grpSpPr/>
+      <p:grpSpPr>
+        <a:xfrm>
+          <a:off x="0" y="0"/>
+          <a:ext cx="0" cy="0"/>
+          <a:chOff x="0" y="0"/>
+          <a:chExt cx="0" cy="0"/>
+        </a:xfrm>
+      </p:grpSpPr>
       <p:sp>
         <p:nvSpPr>
           <p:cNvPr id="2" name="Rectangle 1"/>
@@ -4669,6 +4726,7 @@
           <a:lstStyle/>
           <a:p>
             <a:pPr algn="ctr"/>
+            <a:endParaRPr/>
           </a:p>
         </p:txBody>
       </p:sp>
@@ -4706,7 +4764,7 @@
                 </a:solidFill>
                 <a:latin typeface="Calibri"/>
               </a:rPr>
-              <a:t>SESIÓN DE HOY</a:t>
+              <a:t>CONCEPTO</a:t>
             </a:r>
           </a:p>
         </p:txBody>
@@ -4745,7 +4803,7 @@
                 </a:solidFill>
                 <a:latin typeface="Calibri"/>
               </a:rPr>
-              <a:t>Agenda</a:t>
+              <a:t>Del mockup al prototipo navegable</a:t>
             </a:r>
           </a:p>
         </p:txBody>
@@ -4791,6 +4849,7 @@
           <a:lstStyle/>
           <a:p>
             <a:pPr algn="ctr"/>
+            <a:endParaRPr/>
           </a:p>
         </p:txBody>
       </p:sp>
@@ -4802,8 +4861,8 @@
         </p:nvSpPr>
         <p:spPr>
           <a:xfrm>
-            <a:off x="896112" y="2148840"/>
-            <a:ext cx="10424160" cy="4297680"/>
+            <a:off x="896112" y="2103120"/>
+            <a:ext cx="10515600" cy="4480560"/>
           </a:xfrm>
           <a:prstGeom prst="rect">
             <a:avLst/>
@@ -4818,97 +4877,65 @@
           <a:p>
             <a:pPr>
               <a:spcAft>
-                <a:spcPts val="1600"/>
+                <a:spcPts val="1500"/>
               </a:spcAft>
             </a:pPr>
             <a:r>
-              <a:rPr sz="2600">
+              <a:rPr sz="2300">
                 <a:solidFill>
                   <a:srgbClr val="2B2B2B"/>
                 </a:solidFill>
                 <a:latin typeface="Calibri"/>
               </a:rPr>
-              <a:t>●  Repaso de la sesión 1</a:t>
+              <a:t>•  Un prototipo se puede tocar: pantallas conectadas de verdad</a:t>
             </a:r>
           </a:p>
           <a:p>
             <a:pPr>
               <a:spcAft>
-                <a:spcPts val="1600"/>
+                <a:spcPts val="1500"/>
               </a:spcAft>
             </a:pPr>
             <a:r>
-              <a:rPr sz="2600">
+              <a:rPr sz="2300">
                 <a:solidFill>
                   <a:srgbClr val="2B2B2B"/>
                 </a:solidFill>
                 <a:latin typeface="Calibri"/>
               </a:rPr>
-              <a:t>●  Prototipos navegables</a:t>
+              <a:t>•  Flujo lista → detalle → volver</a:t>
             </a:r>
           </a:p>
           <a:p>
             <a:pPr>
               <a:spcAft>
-                <a:spcPts val="1600"/>
+                <a:spcPts val="1500"/>
               </a:spcAft>
             </a:pPr>
             <a:r>
-              <a:rPr sz="2600">
+              <a:rPr sz="2300">
                 <a:solidFill>
                   <a:srgbClr val="2B2B2B"/>
                 </a:solidFill>
                 <a:latin typeface="Calibri"/>
               </a:rPr>
-              <a:t>●  Identidad visual como sistema</a:t>
+              <a:t>•  Incluye estados y microinteracciones</a:t>
             </a:r>
           </a:p>
           <a:p>
             <a:pPr>
               <a:spcAft>
-                <a:spcPts val="1600"/>
+                <a:spcPts val="1500"/>
               </a:spcAft>
             </a:pPr>
             <a:r>
-              <a:rPr sz="2600">
+              <a:rPr sz="2300">
                 <a:solidFill>
                   <a:srgbClr val="2B2B2B"/>
                 </a:solidFill>
                 <a:latin typeface="Calibri"/>
               </a:rPr>
-              <a:t>●  Imágenes con Nano Banana (playground)</a:t>
-            </a:r>
-          </a:p>
-          <a:p>
-            <a:pPr>
-              <a:spcAft>
-                <a:spcPts val="1600"/>
-              </a:spcAft>
-            </a:pPr>
-            <a:r>
-              <a:rPr sz="2600">
-                <a:solidFill>
-                  <a:srgbClr val="2B2B2B"/>
-                </a:solidFill>
-                <a:latin typeface="Calibri"/>
-              </a:rPr>
-              <a:t>●  Modo de anotación</a:t>
-            </a:r>
-          </a:p>
-          <a:p>
-            <a:pPr>
-              <a:spcAft>
-                <a:spcPts val="1600"/>
-              </a:spcAft>
-            </a:pPr>
-            <a:r>
-              <a:rPr sz="2600">
-                <a:solidFill>
-                  <a:srgbClr val="2B2B2B"/>
-                </a:solidFill>
-                <a:latin typeface="Calibri"/>
-              </a:rPr>
-              <a:t>●  Laboratorio 2 y tarea</a:t>
+              <a:t>•  Es más que una imagen estática: es una experiencia</a:t>
             </a:r>
           </a:p>
         </p:txBody>
@@ -4921,8 +4948,8 @@
 </p:sld>
 </file>
 
-<file path=ppt/slides/slide3.xml><?xml version="1.0" encoding="utf-8"?>
-<p:sld xmlns:a="http://schemas.openxmlformats.org/drawingml/2006/main" xmlns:p="http://schemas.openxmlformats.org/presentationml/2006/main" xmlns:r="http://schemas.openxmlformats.org/officeDocument/2006/relationships">
+<file path=ppt/slides/slide4.xml><?xml version="1.0" encoding="utf-8"?>
+<p:sld xmlns:a="http://schemas.openxmlformats.org/drawingml/2006/main" xmlns:r="http://schemas.openxmlformats.org/officeDocument/2006/relationships" xmlns:p="http://schemas.openxmlformats.org/presentationml/2006/main">
   <p:cSld>
     <p:bg>
       <p:bgPr>
@@ -4938,7 +4965,14 @@
         <p:cNvGrpSpPr/>
         <p:nvPr/>
       </p:nvGrpSpPr>
-      <p:grpSpPr/>
+      <p:grpSpPr>
+        <a:xfrm>
+          <a:off x="0" y="0"/>
+          <a:ext cx="0" cy="0"/>
+          <a:chOff x="0" y="0"/>
+          <a:chExt cx="0" cy="0"/>
+        </a:xfrm>
+      </p:grpSpPr>
       <p:sp>
         <p:nvSpPr>
           <p:cNvPr id="2" name="Rectangle 1"/>
@@ -4980,6 +5014,7 @@
           <a:lstStyle/>
           <a:p>
             <a:pPr algn="ctr"/>
+            <a:endParaRPr/>
           </a:p>
         </p:txBody>
       </p:sp>
@@ -5017,7 +5052,7 @@
                 </a:solidFill>
                 <a:latin typeface="Calibri"/>
               </a:rPr>
-              <a:t>CONCEPTO</a:t>
+              <a:t>TU MARCA</a:t>
             </a:r>
           </a:p>
         </p:txBody>
@@ -5056,7 +5091,7 @@
                 </a:solidFill>
                 <a:latin typeface="Calibri"/>
               </a:rPr>
-              <a:t>Del mockup al prototipo navegable</a:t>
+              <a:t>Identidad visual como sistema</a:t>
             </a:r>
           </a:p>
         </p:txBody>
@@ -5102,6 +5137,7 @@
           <a:lstStyle/>
           <a:p>
             <a:pPr algn="ctr"/>
+            <a:endParaRPr/>
           </a:p>
         </p:txBody>
       </p:sp>
@@ -5139,7 +5175,7 @@
                 </a:solidFill>
                 <a:latin typeface="Calibri"/>
               </a:rPr>
-              <a:t>•  Un prototipo se puede tocar: pantallas conectadas de verdad</a:t>
+              <a:t>•  Nombre, paleta de color, tipografía y tono</a:t>
             </a:r>
           </a:p>
           <a:p>
@@ -5155,7 +5191,7 @@
                 </a:solidFill>
                 <a:latin typeface="Calibri"/>
               </a:rPr>
-              <a:t>•  Flujo lista → detalle → volver</a:t>
+              <a:t>•  Colores en hexadecimal: #6D2E46, no "vino"</a:t>
             </a:r>
           </a:p>
           <a:p>
@@ -5171,7 +5207,7 @@
                 </a:solidFill>
                 <a:latin typeface="Calibri"/>
               </a:rPr>
-              <a:t>•  Incluye estados y microinteracciones</a:t>
+              <a:t>•  Consistencia en toda la app</a:t>
             </a:r>
           </a:p>
           <a:p>
@@ -5187,7 +5223,7 @@
                 </a:solidFill>
                 <a:latin typeface="Calibri"/>
               </a:rPr>
-              <a:t>•  Es más que una imagen estática: es una experiencia</a:t>
+              <a:t>•  Contraste accesible: tu criterio de diseño marca la diferencia</a:t>
             </a:r>
           </a:p>
         </p:txBody>
@@ -5200,8 +5236,8 @@
 </p:sld>
 </file>
 
-<file path=ppt/slides/slide4.xml><?xml version="1.0" encoding="utf-8"?>
-<p:sld xmlns:a="http://schemas.openxmlformats.org/drawingml/2006/main" xmlns:p="http://schemas.openxmlformats.org/presentationml/2006/main" xmlns:r="http://schemas.openxmlformats.org/officeDocument/2006/relationships">
+<file path=ppt/slides/slide5.xml><?xml version="1.0" encoding="utf-8"?>
+<p:sld xmlns:a="http://schemas.openxmlformats.org/drawingml/2006/main" xmlns:r="http://schemas.openxmlformats.org/officeDocument/2006/relationships" xmlns:p="http://schemas.openxmlformats.org/presentationml/2006/main">
   <p:cSld>
     <p:bg>
       <p:bgPr>
@@ -5217,7 +5253,14 @@
         <p:cNvGrpSpPr/>
         <p:nvPr/>
       </p:nvGrpSpPr>
-      <p:grpSpPr/>
+      <p:grpSpPr>
+        <a:xfrm>
+          <a:off x="0" y="0"/>
+          <a:ext cx="0" cy="0"/>
+          <a:chOff x="0" y="0"/>
+          <a:chExt cx="0" cy="0"/>
+        </a:xfrm>
+      </p:grpSpPr>
       <p:sp>
         <p:nvSpPr>
           <p:cNvPr id="2" name="Rectangle 1"/>
@@ -5259,6 +5302,7 @@
           <a:lstStyle/>
           <a:p>
             <a:pPr algn="ctr"/>
+            <a:endParaRPr/>
           </a:p>
         </p:txBody>
       </p:sp>
@@ -5296,7 +5340,7 @@
                 </a:solidFill>
                 <a:latin typeface="Calibri"/>
               </a:rPr>
-              <a:t>TU MARCA</a:t>
+              <a:t>CAMBIOS PRECISOS</a:t>
             </a:r>
           </a:p>
         </p:txBody>
@@ -5335,7 +5379,7 @@
                 </a:solidFill>
                 <a:latin typeface="Calibri"/>
               </a:rPr>
-              <a:t>Identidad visual como sistema</a:t>
+              <a:t>Modo de anotación</a:t>
             </a:r>
           </a:p>
         </p:txBody>
@@ -5381,6 +5425,7 @@
           <a:lstStyle/>
           <a:p>
             <a:pPr algn="ctr"/>
+            <a:endParaRPr/>
           </a:p>
         </p:txBody>
       </p:sp>
@@ -5418,7 +5463,7 @@
                 </a:solidFill>
                 <a:latin typeface="Calibri"/>
               </a:rPr>
-              <a:t>•  Nombre, paleta de color, tipografía y tono</a:t>
+              <a:t>•  Haz clic sobre el elemento en la vista previa</a:t>
             </a:r>
           </a:p>
           <a:p>
@@ -5434,7 +5479,7 @@
                 </a:solidFill>
                 <a:latin typeface="Calibri"/>
               </a:rPr>
-              <a:t>•  Colores en hexadecimal: #6D2E46, no "vino"</a:t>
+              <a:t>•  Describe el ajuste justo ahí</a:t>
             </a:r>
           </a:p>
           <a:p>
@@ -5450,7 +5495,7 @@
                 </a:solidFill>
                 <a:latin typeface="Calibri"/>
               </a:rPr>
-              <a:t>•  Consistencia en toda la app</a:t>
+              <a:t>•  Más preciso que describirlo solo con palabras</a:t>
             </a:r>
           </a:p>
           <a:p>
@@ -5466,7 +5511,7 @@
                 </a:solidFill>
                 <a:latin typeface="Calibri"/>
               </a:rPr>
-              <a:t>•  Contraste accesible: tu criterio de diseño marca la diferencia</a:t>
+              <a:t>•  Ideal para pulir detalles visuales</a:t>
             </a:r>
           </a:p>
         </p:txBody>
@@ -5479,8 +5524,8 @@
 </p:sld>
 </file>
 
-<file path=ppt/slides/slide5.xml><?xml version="1.0" encoding="utf-8"?>
-<p:sld xmlns:a="http://schemas.openxmlformats.org/drawingml/2006/main" xmlns:p="http://schemas.openxmlformats.org/presentationml/2006/main" xmlns:r="http://schemas.openxmlformats.org/officeDocument/2006/relationships">
+<file path=ppt/slides/slide6.xml><?xml version="1.0" encoding="utf-8"?>
+<p:sld xmlns:a="http://schemas.openxmlformats.org/drawingml/2006/main" xmlns:r="http://schemas.openxmlformats.org/officeDocument/2006/relationships" xmlns:p="http://schemas.openxmlformats.org/presentationml/2006/main">
   <p:cSld>
     <p:bg>
       <p:bgPr>
@@ -5496,7 +5541,14 @@
         <p:cNvGrpSpPr/>
         <p:nvPr/>
       </p:nvGrpSpPr>
-      <p:grpSpPr/>
+      <p:grpSpPr>
+        <a:xfrm>
+          <a:off x="0" y="0"/>
+          <a:ext cx="0" cy="0"/>
+          <a:chOff x="0" y="0"/>
+          <a:chExt cx="0" cy="0"/>
+        </a:xfrm>
+      </p:grpSpPr>
       <p:sp>
         <p:nvSpPr>
           <p:cNvPr id="2" name="Rectangle 1"/>
@@ -5538,6 +5590,7 @@
           <a:lstStyle/>
           <a:p>
             <a:pPr algn="ctr"/>
+            <a:endParaRPr/>
           </a:p>
         </p:txBody>
       </p:sp>
@@ -5575,7 +5628,7 @@
                 </a:solidFill>
                 <a:latin typeface="Calibri"/>
               </a:rPr>
-              <a:t>RECURSO OPCIONAL</a:t>
+              <a:t>VOCABULARIO DE DISEÑO, NO PROGRAMACIÓN</a:t>
             </a:r>
           </a:p>
         </p:txBody>
@@ -5614,7 +5667,7 @@
                 </a:solidFill>
                 <a:latin typeface="Calibri"/>
               </a:rPr>
-              <a:t>Generar imágenes con Nano Banana (en el playground)</a:t>
+              <a:t>Dónde viven los colores y estilos (PWA)</a:t>
             </a:r>
           </a:p>
         </p:txBody>
@@ -5660,6 +5713,7 @@
           <a:lstStyle/>
           <a:p>
             <a:pPr algn="ctr"/>
+            <a:endParaRPr/>
           </a:p>
         </p:txBody>
       </p:sp>
@@ -5697,7 +5751,7 @@
                 </a:solidFill>
                 <a:latin typeface="Calibri"/>
               </a:rPr>
-              <a:t>•  Vive en el playground de AI Studio, aparte del modo Build</a:t>
+              <a:t>•  La pestaña Code muestra los archivos que generó la IA; no hay que escribirlos, solo saber leerlos</a:t>
             </a:r>
           </a:p>
           <a:p>
@@ -5713,7 +5767,7 @@
                 </a:solidFill>
                 <a:latin typeface="Calibri"/>
               </a:rPr>
-              <a:t>•  Nano Banana: generar y editar imágenes (íconos, ilustraciones)</a:t>
+              <a:t>•  Los colores suelen vivir juntos (config de estilos): ahí cambias la paleta de toda la app</a:t>
             </a:r>
           </a:p>
           <a:p>
@@ -5729,7 +5783,7 @@
                 </a:solidFill>
                 <a:latin typeface="Calibri"/>
               </a:rPr>
-              <a:t>•  Útil para portadas, banners e ilustraciones</a:t>
+              <a:t>•  La tipografía y los tamaños se definen una vez y se reutilizan: consistencia por diseño</a:t>
             </a:r>
           </a:p>
           <a:p>
@@ -5745,7 +5799,23 @@
                 </a:solidFill>
                 <a:latin typeface="Calibri"/>
               </a:rPr>
-              <a:t>•  Las imágenes pueden alimentar el campo imagenUrl</a:t>
+              <a:t>•  Puedes ajustar a mano un valor (por ejemplo un hexadecimal) y ver el cambio en la vista previa</a:t>
+            </a:r>
+          </a:p>
+          <a:p>
+            <a:pPr>
+              <a:spcAft>
+                <a:spcPts val="1500"/>
+              </a:spcAft>
+            </a:pPr>
+            <a:r>
+              <a:rPr sz="2300">
+                <a:solidFill>
+                  <a:srgbClr val="2B2B2B"/>
+                </a:solidFill>
+                <a:latin typeface="Calibri"/>
+              </a:rPr>
+              <a:t>•  Aun así, lo normal es pedir el cambio por prompt; editar a mano es solo para retoques finos</a:t>
             </a:r>
           </a:p>
         </p:txBody>
@@ -5758,8 +5828,8 @@
 </p:sld>
 </file>
 
-<file path=ppt/slides/slide6.xml><?xml version="1.0" encoding="utf-8"?>
-<p:sld xmlns:a="http://schemas.openxmlformats.org/drawingml/2006/main" xmlns:p="http://schemas.openxmlformats.org/presentationml/2006/main" xmlns:r="http://schemas.openxmlformats.org/officeDocument/2006/relationships">
+<file path=ppt/slides/slide7.xml><?xml version="1.0" encoding="utf-8"?>
+<p:sld xmlns:a="http://schemas.openxmlformats.org/drawingml/2006/main" xmlns:r="http://schemas.openxmlformats.org/officeDocument/2006/relationships" xmlns:p="http://schemas.openxmlformats.org/presentationml/2006/main">
   <p:cSld>
     <p:bg>
       <p:bgPr>
@@ -5775,7 +5845,14 @@
         <p:cNvGrpSpPr/>
         <p:nvPr/>
       </p:nvGrpSpPr>
-      <p:grpSpPr/>
+      <p:grpSpPr>
+        <a:xfrm>
+          <a:off x="0" y="0"/>
+          <a:ext cx="0" cy="0"/>
+          <a:chOff x="0" y="0"/>
+          <a:chExt cx="0" cy="0"/>
+        </a:xfrm>
+      </p:grpSpPr>
       <p:sp>
         <p:nvSpPr>
           <p:cNvPr id="2" name="Rectangle 1"/>
@@ -5791,7 +5868,7 @@
             <a:avLst/>
           </a:prstGeom>
           <a:solidFill>
-            <a:srgbClr val="C84B31"/>
+            <a:srgbClr val="4F772D"/>
           </a:solidFill>
           <a:ln>
             <a:noFill/>
@@ -5817,6 +5894,7 @@
           <a:lstStyle/>
           <a:p>
             <a:pPr algn="ctr"/>
+            <a:endParaRPr/>
           </a:p>
         </p:txBody>
       </p:sp>
@@ -5854,7 +5932,7 @@
                 </a:solidFill>
                 <a:latin typeface="Calibri"/>
               </a:rPr>
-              <a:t>CAMBIOS PRECISOS</a:t>
+              <a:t>DEMO DEL DOCENTE · EN VIVO</a:t>
             </a:r>
           </a:p>
         </p:txBody>
@@ -5893,7 +5971,7 @@
                 </a:solidFill>
                 <a:latin typeface="Calibri"/>
               </a:rPr>
-              <a:t>Modo de anotación</a:t>
+              <a:t>Adopta un Peludo</a:t>
             </a:r>
           </a:p>
         </p:txBody>
@@ -5939,19 +6017,104 @@
           <a:lstStyle/>
           <a:p>
             <a:pPr algn="ctr"/>
-          </a:p>
-        </p:txBody>
-      </p:sp>
-      <p:sp>
-        <p:nvSpPr>
-          <p:cNvPr id="6" name="TextBox 5"/>
+            <a:endParaRPr/>
+          </a:p>
+        </p:txBody>
+      </p:sp>
+      <p:sp>
+        <p:nvSpPr>
+          <p:cNvPr id="6" name="Rounded Rectangle 5"/>
+          <p:cNvSpPr/>
+          <p:nvPr/>
+        </p:nvSpPr>
+        <p:spPr>
+          <a:xfrm>
+            <a:off x="896112" y="2148840"/>
+            <a:ext cx="6583680" cy="566928"/>
+          </a:xfrm>
+          <a:prstGeom prst="roundRect">
+            <a:avLst/>
+          </a:prstGeom>
+          <a:solidFill>
+            <a:srgbClr val="F6ECDD"/>
+          </a:solidFill>
+          <a:ln>
+            <a:noFill/>
+          </a:ln>
+          <a:effectLst/>
+        </p:spPr>
+        <p:style>
+          <a:lnRef idx="1">
+            <a:schemeClr val="accent1"/>
+          </a:lnRef>
+          <a:fillRef idx="3">
+            <a:schemeClr val="accent1"/>
+          </a:fillRef>
+          <a:effectRef idx="2">
+            <a:schemeClr val="accent1"/>
+          </a:effectRef>
+          <a:fontRef idx="minor">
+            <a:schemeClr val="lt1"/>
+          </a:fontRef>
+        </p:style>
+        <p:txBody>
+          <a:bodyPr rtlCol="0" anchor="ctr"/>
+          <a:lstStyle/>
+          <a:p>
+            <a:pPr algn="ctr"/>
+            <a:endParaRPr/>
+          </a:p>
+        </p:txBody>
+      </p:sp>
+      <p:sp>
+        <p:nvSpPr>
+          <p:cNvPr id="7" name="TextBox 6"/>
           <p:cNvSpPr txBox="1"/>
           <p:nvPr/>
         </p:nvSpPr>
         <p:spPr>
           <a:xfrm>
-            <a:off x="896112" y="2103120"/>
-            <a:ext cx="10515600" cy="4480560"/>
+            <a:off x="1170432" y="2240280"/>
+            <a:ext cx="6035040" cy="457200"/>
+          </a:xfrm>
+          <a:prstGeom prst="rect">
+            <a:avLst/>
+          </a:prstGeom>
+          <a:noFill/>
+        </p:spPr>
+        <p:txBody>
+          <a:bodyPr wrap="square" anchor="ctr">
+            <a:spAutoFit/>
+          </a:bodyPr>
+          <a:lstStyle/>
+          <a:p>
+            <a:pPr algn="l">
+              <a:spcAft>
+                <a:spcPts val="600"/>
+              </a:spcAft>
+            </a:pPr>
+            <a:r>
+              <a:rPr sz="1700" b="1">
+                <a:solidFill>
+                  <a:srgbClr val="6D2E46"/>
+                </a:solidFill>
+                <a:latin typeface="Calibri"/>
+              </a:rPr>
+              <a:t>El docente la construye en vivo — no es tu entrega</a:t>
+            </a:r>
+          </a:p>
+        </p:txBody>
+      </p:sp>
+      <p:sp>
+        <p:nvSpPr>
+          <p:cNvPr id="8" name="TextBox 7"/>
+          <p:cNvSpPr txBox="1"/>
+          <p:nvPr/>
+        </p:nvSpPr>
+        <p:spPr>
+          <a:xfrm>
+            <a:off x="896112" y="2971800"/>
+            <a:ext cx="6583680" cy="2103120"/>
           </a:xfrm>
           <a:prstGeom prst="rect">
             <a:avLst/>
@@ -5966,65 +6129,198 @@
           <a:p>
             <a:pPr>
               <a:spcAft>
-                <a:spcPts val="1500"/>
+                <a:spcPts val="1400"/>
               </a:spcAft>
             </a:pPr>
             <a:r>
-              <a:rPr sz="2300">
+              <a:rPr sz="2200">
                 <a:solidFill>
                   <a:srgbClr val="2B2B2B"/>
                 </a:solidFill>
                 <a:latin typeface="Calibri"/>
               </a:rPr>
-              <a:t>•  Haz clic sobre el elemento en la vista previa</a:t>
+              <a:t>•  Mascotas en adopción, con su ficha de detalle (PWA)</a:t>
             </a:r>
           </a:p>
           <a:p>
             <a:pPr>
               <a:spcAft>
-                <a:spcPts val="1500"/>
+                <a:spcPts val="1400"/>
               </a:spcAft>
             </a:pPr>
             <a:r>
-              <a:rPr sz="2300">
+              <a:rPr sz="2200">
                 <a:solidFill>
                   <a:srgbClr val="2B2B2B"/>
                 </a:solidFill>
                 <a:latin typeface="Calibri"/>
               </a:rPr>
-              <a:t>•  Describe el ajuste justo ahí</a:t>
+              <a:t>•  Ilustra el flujo lista → detalle → volver y una identidad visual propia</a:t>
             </a:r>
           </a:p>
           <a:p>
             <a:pPr>
               <a:spcAft>
-                <a:spcPts val="1500"/>
+                <a:spcPts val="1400"/>
               </a:spcAft>
             </a:pPr>
             <a:r>
-              <a:rPr sz="2300">
+              <a:rPr sz="2200">
                 <a:solidFill>
                   <a:srgbClr val="2B2B2B"/>
                 </a:solidFill>
                 <a:latin typeface="Calibri"/>
               </a:rPr>
-              <a:t>•  Más preciso que describirlo solo con palabras</a:t>
-            </a:r>
-          </a:p>
-          <a:p>
-            <a:pPr>
+              <a:t>•  El docente la construye y la pule en vivo con el modo de anotación</a:t>
+            </a:r>
+          </a:p>
+        </p:txBody>
+      </p:sp>
+      <p:sp>
+        <p:nvSpPr>
+          <p:cNvPr id="9" name="TextBox 8"/>
+          <p:cNvSpPr txBox="1"/>
+          <p:nvPr/>
+        </p:nvSpPr>
+        <p:spPr>
+          <a:xfrm>
+            <a:off x="896112" y="5257800"/>
+            <a:ext cx="6583680" cy="1188720"/>
+          </a:xfrm>
+          <a:prstGeom prst="rect">
+            <a:avLst/>
+          </a:prstGeom>
+          <a:noFill/>
+        </p:spPr>
+        <p:txBody>
+          <a:bodyPr wrap="square" anchor="t">
+            <a:spAutoFit/>
+          </a:bodyPr>
+          <a:lstStyle/>
+          <a:p>
+            <a:pPr algn="l">
               <a:spcAft>
-                <a:spcPts val="1500"/>
+                <a:spcPts val="600"/>
               </a:spcAft>
             </a:pPr>
             <a:r>
-              <a:rPr sz="2300">
-                <a:solidFill>
-                  <a:srgbClr val="2B2B2B"/>
-                </a:solidFill>
-                <a:latin typeface="Calibri"/>
-              </a:rPr>
-              <a:t>•  Ideal para pulir detalles visuales</a:t>
+              <a:rPr sz="1500" b="0">
+                <a:solidFill>
+                  <a:srgbClr val="6F645B"/>
+                </a:solidFill>
+                <a:latin typeface="Calibri"/>
+              </a:rPr>
+              <a:t>Ilustra el concepto del día con una app distinta. Tu laboratorio sigue en la app insignia y en tu propia idea.</a:t>
+            </a:r>
+          </a:p>
+        </p:txBody>
+      </p:sp>
+      <p:sp>
+        <p:nvSpPr>
+          <p:cNvPr id="10" name="Rounded Rectangle 9"/>
+          <p:cNvSpPr/>
+          <p:nvPr/>
+        </p:nvSpPr>
+        <p:spPr>
+          <a:xfrm>
+            <a:off x="7772400" y="3202083"/>
+            <a:ext cx="3749040" cy="2099754"/>
+          </a:xfrm>
+          <a:prstGeom prst="roundRect">
+            <a:avLst/>
+          </a:prstGeom>
+          <a:solidFill>
+            <a:srgbClr val="FFFFFF"/>
+          </a:solidFill>
+          <a:ln w="15240">
+            <a:solidFill>
+              <a:srgbClr val="6D2E46"/>
+            </a:solidFill>
+          </a:ln>
+          <a:effectLst/>
+        </p:spPr>
+        <p:style>
+          <a:lnRef idx="1">
+            <a:schemeClr val="accent1"/>
+          </a:lnRef>
+          <a:fillRef idx="3">
+            <a:schemeClr val="accent1"/>
+          </a:fillRef>
+          <a:effectRef idx="2">
+            <a:schemeClr val="accent1"/>
+          </a:effectRef>
+          <a:fontRef idx="minor">
+            <a:schemeClr val="lt1"/>
+          </a:fontRef>
+        </p:style>
+        <p:txBody>
+          <a:bodyPr rtlCol="0" anchor="ctr"/>
+          <a:lstStyle/>
+          <a:p>
+            <a:pPr algn="ctr"/>
+            <a:endParaRPr/>
+          </a:p>
+        </p:txBody>
+      </p:sp>
+      <p:pic>
+        <p:nvPicPr>
+          <p:cNvPr id="11" name="Picture 10" descr="demo-adopta.png"/>
+          <p:cNvPicPr>
+            <a:picLocks noChangeAspect="1"/>
+          </p:cNvPicPr>
+          <p:nvPr/>
+        </p:nvPicPr>
+        <p:blipFill>
+          <a:blip r:embed="rId2"/>
+          <a:stretch>
+            <a:fillRect/>
+          </a:stretch>
+        </p:blipFill>
+        <p:spPr>
+          <a:xfrm>
+            <a:off x="7818120" y="3247803"/>
+            <a:ext cx="3657600" cy="2008314"/>
+          </a:xfrm>
+          <a:prstGeom prst="rect">
+            <a:avLst/>
+          </a:prstGeom>
+        </p:spPr>
+      </p:pic>
+      <p:sp>
+        <p:nvSpPr>
+          <p:cNvPr id="12" name="TextBox 11"/>
+          <p:cNvSpPr txBox="1"/>
+          <p:nvPr/>
+        </p:nvSpPr>
+        <p:spPr>
+          <a:xfrm>
+            <a:off x="7818120" y="6419088"/>
+            <a:ext cx="3657600" cy="365760"/>
+          </a:xfrm>
+          <a:prstGeom prst="rect">
+            <a:avLst/>
+          </a:prstGeom>
+          <a:noFill/>
+        </p:spPr>
+        <p:txBody>
+          <a:bodyPr wrap="square" anchor="t">
+            <a:spAutoFit/>
+          </a:bodyPr>
+          <a:lstStyle/>
+          <a:p>
+            <a:pPr algn="ctr">
+              <a:spcAft>
+                <a:spcPts val="600"/>
+              </a:spcAft>
+            </a:pPr>
+            <a:r>
+              <a:rPr sz="1200" b="1">
+                <a:solidFill>
+                  <a:srgbClr val="6D2E46"/>
+                </a:solidFill>
+                <a:latin typeface="Calibri"/>
+              </a:rPr>
+              <a:t>Captura real de la demo</a:t>
             </a:r>
           </a:p>
         </p:txBody>
@@ -6037,8 +6333,8 @@
 </p:sld>
 </file>
 
-<file path=ppt/slides/slide7.xml><?xml version="1.0" encoding="utf-8"?>
-<p:sld xmlns:a="http://schemas.openxmlformats.org/drawingml/2006/main" xmlns:p="http://schemas.openxmlformats.org/presentationml/2006/main" xmlns:r="http://schemas.openxmlformats.org/officeDocument/2006/relationships">
+<file path=ppt/slides/slide8.xml><?xml version="1.0" encoding="utf-8"?>
+<p:sld xmlns:a="http://schemas.openxmlformats.org/drawingml/2006/main" xmlns:r="http://schemas.openxmlformats.org/officeDocument/2006/relationships" xmlns:p="http://schemas.openxmlformats.org/presentationml/2006/main">
   <p:cSld>
     <p:bg>
       <p:bgPr>
@@ -6054,7 +6350,14 @@
         <p:cNvGrpSpPr/>
         <p:nvPr/>
       </p:nvGrpSpPr>
-      <p:grpSpPr/>
+      <p:grpSpPr>
+        <a:xfrm>
+          <a:off x="0" y="0"/>
+          <a:ext cx="0" cy="0"/>
+          <a:chOff x="0" y="0"/>
+          <a:chExt cx="0" cy="0"/>
+        </a:xfrm>
+      </p:grpSpPr>
       <p:sp>
         <p:nvSpPr>
           <p:cNvPr id="2" name="Rectangle 1"/>
@@ -6065,6 +6368,413 @@
           <a:xfrm>
             <a:off x="0" y="0"/>
             <a:ext cx="12191695" cy="146304"/>
+          </a:xfrm>
+          <a:prstGeom prst="rect">
+            <a:avLst/>
+          </a:prstGeom>
+          <a:solidFill>
+            <a:srgbClr val="4F772D"/>
+          </a:solidFill>
+          <a:ln>
+            <a:noFill/>
+          </a:ln>
+          <a:effectLst/>
+        </p:spPr>
+        <p:style>
+          <a:lnRef idx="1">
+            <a:schemeClr val="accent1"/>
+          </a:lnRef>
+          <a:fillRef idx="3">
+            <a:schemeClr val="accent1"/>
+          </a:fillRef>
+          <a:effectRef idx="2">
+            <a:schemeClr val="accent1"/>
+          </a:effectRef>
+          <a:fontRef idx="minor">
+            <a:schemeClr val="lt1"/>
+          </a:fontRef>
+        </p:style>
+        <p:txBody>
+          <a:bodyPr rtlCol="0" anchor="ctr"/>
+          <a:lstStyle/>
+          <a:p>
+            <a:pPr algn="ctr"/>
+            <a:endParaRPr/>
+          </a:p>
+        </p:txBody>
+      </p:sp>
+      <p:sp>
+        <p:nvSpPr>
+          <p:cNvPr id="3" name="TextBox 2"/>
+          <p:cNvSpPr txBox="1"/>
+          <p:nvPr/>
+        </p:nvSpPr>
+        <p:spPr>
+          <a:xfrm>
+            <a:off x="822960" y="457200"/>
+            <a:ext cx="10515600" cy="457200"/>
+          </a:xfrm>
+          <a:prstGeom prst="rect">
+            <a:avLst/>
+          </a:prstGeom>
+          <a:noFill/>
+        </p:spPr>
+        <p:txBody>
+          <a:bodyPr wrap="square" anchor="t">
+            <a:spAutoFit/>
+          </a:bodyPr>
+          <a:lstStyle/>
+          <a:p>
+            <a:pPr algn="l">
+              <a:spcAft>
+                <a:spcPts val="600"/>
+              </a:spcAft>
+            </a:pPr>
+            <a:r>
+              <a:rPr sz="1800" b="1">
+                <a:solidFill>
+                  <a:srgbClr val="C84B31"/>
+                </a:solidFill>
+                <a:latin typeface="Calibri"/>
+              </a:rPr>
+              <a:t>LISTA → DETALLE → VOLVER</a:t>
+            </a:r>
+          </a:p>
+        </p:txBody>
+      </p:sp>
+      <p:sp>
+        <p:nvSpPr>
+          <p:cNvPr id="4" name="TextBox 3"/>
+          <p:cNvSpPr txBox="1"/>
+          <p:nvPr/>
+        </p:nvSpPr>
+        <p:spPr>
+          <a:xfrm>
+            <a:off x="822960" y="914400"/>
+            <a:ext cx="10607040" cy="1005840"/>
+          </a:xfrm>
+          <a:prstGeom prst="rect">
+            <a:avLst/>
+          </a:prstGeom>
+          <a:noFill/>
+        </p:spPr>
+        <p:txBody>
+          <a:bodyPr wrap="square" anchor="t">
+            <a:spAutoFit/>
+          </a:bodyPr>
+          <a:lstStyle/>
+          <a:p>
+            <a:pPr algn="l">
+              <a:spcAft>
+                <a:spcPts val="600"/>
+              </a:spcAft>
+            </a:pPr>
+            <a:r>
+              <a:rPr sz="3800" b="1">
+                <a:solidFill>
+                  <a:srgbClr val="6D2E46"/>
+                </a:solidFill>
+                <a:latin typeface="Calibri"/>
+              </a:rPr>
+              <a:t>La navegación de un prototipo</a:t>
+            </a:r>
+          </a:p>
+        </p:txBody>
+      </p:sp>
+      <p:sp>
+        <p:nvSpPr>
+          <p:cNvPr id="5" name="Rectangle 4"/>
+          <p:cNvSpPr/>
+          <p:nvPr/>
+        </p:nvSpPr>
+        <p:spPr>
+          <a:xfrm>
+            <a:off x="868680" y="1783080"/>
+            <a:ext cx="1554480" cy="64008"/>
+          </a:xfrm>
+          <a:prstGeom prst="rect">
+            <a:avLst/>
+          </a:prstGeom>
+          <a:solidFill>
+            <a:srgbClr val="E3B23C"/>
+          </a:solidFill>
+          <a:ln>
+            <a:noFill/>
+          </a:ln>
+          <a:effectLst/>
+        </p:spPr>
+        <p:style>
+          <a:lnRef idx="1">
+            <a:schemeClr val="accent1"/>
+          </a:lnRef>
+          <a:fillRef idx="3">
+            <a:schemeClr val="accent1"/>
+          </a:fillRef>
+          <a:effectRef idx="2">
+            <a:schemeClr val="accent1"/>
+          </a:effectRef>
+          <a:fontRef idx="minor">
+            <a:schemeClr val="lt1"/>
+          </a:fontRef>
+        </p:style>
+        <p:txBody>
+          <a:bodyPr rtlCol="0" anchor="ctr"/>
+          <a:lstStyle/>
+          <a:p>
+            <a:pPr algn="ctr"/>
+            <a:endParaRPr/>
+          </a:p>
+        </p:txBody>
+      </p:sp>
+      <p:sp>
+        <p:nvSpPr>
+          <p:cNvPr id="6" name="Rounded Rectangle 5"/>
+          <p:cNvSpPr/>
+          <p:nvPr/>
+        </p:nvSpPr>
+        <p:spPr>
+          <a:xfrm>
+            <a:off x="822960" y="3017520"/>
+            <a:ext cx="2274570" cy="1920240"/>
+          </a:xfrm>
+          <a:prstGeom prst="roundRect">
+            <a:avLst/>
+          </a:prstGeom>
+          <a:solidFill>
+            <a:srgbClr val="FFFFFF"/>
+          </a:solidFill>
+          <a:ln w="15240">
+            <a:solidFill>
+              <a:srgbClr val="EADDC8"/>
+            </a:solidFill>
+          </a:ln>
+          <a:effectLst/>
+        </p:spPr>
+        <p:style>
+          <a:lnRef idx="1">
+            <a:schemeClr val="accent1"/>
+          </a:lnRef>
+          <a:fillRef idx="3">
+            <a:schemeClr val="accent1"/>
+          </a:fillRef>
+          <a:effectRef idx="2">
+            <a:schemeClr val="accent1"/>
+          </a:effectRef>
+          <a:fontRef idx="minor">
+            <a:schemeClr val="lt1"/>
+          </a:fontRef>
+        </p:style>
+        <p:txBody>
+          <a:bodyPr rtlCol="0" anchor="ctr"/>
+          <a:lstStyle/>
+          <a:p>
+            <a:pPr algn="ctr"/>
+            <a:endParaRPr/>
+          </a:p>
+        </p:txBody>
+      </p:sp>
+      <p:sp>
+        <p:nvSpPr>
+          <p:cNvPr id="7" name="Rectangle 6"/>
+          <p:cNvSpPr/>
+          <p:nvPr/>
+        </p:nvSpPr>
+        <p:spPr>
+          <a:xfrm>
+            <a:off x="822960" y="3017520"/>
+            <a:ext cx="2274570" cy="128016"/>
+          </a:xfrm>
+          <a:prstGeom prst="rect">
+            <a:avLst/>
+          </a:prstGeom>
+          <a:solidFill>
+            <a:srgbClr val="6D2E46"/>
+          </a:solidFill>
+          <a:ln>
+            <a:noFill/>
+          </a:ln>
+          <a:effectLst/>
+        </p:spPr>
+        <p:style>
+          <a:lnRef idx="1">
+            <a:schemeClr val="accent1"/>
+          </a:lnRef>
+          <a:fillRef idx="3">
+            <a:schemeClr val="accent1"/>
+          </a:fillRef>
+          <a:effectRef idx="2">
+            <a:schemeClr val="accent1"/>
+          </a:effectRef>
+          <a:fontRef idx="minor">
+            <a:schemeClr val="lt1"/>
+          </a:fontRef>
+        </p:style>
+        <p:txBody>
+          <a:bodyPr rtlCol="0" anchor="ctr"/>
+          <a:lstStyle/>
+          <a:p>
+            <a:pPr algn="ctr"/>
+            <a:endParaRPr/>
+          </a:p>
+        </p:txBody>
+      </p:sp>
+      <p:sp>
+        <p:nvSpPr>
+          <p:cNvPr id="8" name="TextBox 7"/>
+          <p:cNvSpPr txBox="1"/>
+          <p:nvPr/>
+        </p:nvSpPr>
+        <p:spPr>
+          <a:xfrm>
+            <a:off x="960120" y="3474720"/>
+            <a:ext cx="2000250" cy="1280160"/>
+          </a:xfrm>
+          <a:prstGeom prst="rect">
+            <a:avLst/>
+          </a:prstGeom>
+          <a:noFill/>
+        </p:spPr>
+        <p:txBody>
+          <a:bodyPr wrap="square" anchor="ctr">
+            <a:spAutoFit/>
+          </a:bodyPr>
+          <a:lstStyle/>
+          <a:p>
+            <a:pPr algn="ctr">
+              <a:spcAft>
+                <a:spcPts val="600"/>
+              </a:spcAft>
+            </a:pPr>
+            <a:r>
+              <a:rPr sz="1900" b="1">
+                <a:solidFill>
+                  <a:srgbClr val="6D2E46"/>
+                </a:solidFill>
+                <a:latin typeface="Calibri"/>
+              </a:rPr>
+              <a:t>Lista</a:t>
+            </a:r>
+          </a:p>
+          <a:p>
+            <a:pPr algn="ctr">
+              <a:spcAft>
+                <a:spcPts val="600"/>
+              </a:spcAft>
+            </a:pPr>
+            <a:r>
+              <a:rPr sz="1400" b="0">
+                <a:solidFill>
+                  <a:srgbClr val="6F645B"/>
+                </a:solidFill>
+                <a:latin typeface="Calibri"/>
+              </a:rPr>
+              <a:t>tarjetas</a:t>
+            </a:r>
+          </a:p>
+        </p:txBody>
+      </p:sp>
+      <p:sp>
+        <p:nvSpPr>
+          <p:cNvPr id="9" name="Right Arrow 8"/>
+          <p:cNvSpPr/>
+          <p:nvPr/>
+        </p:nvSpPr>
+        <p:spPr>
+          <a:xfrm>
+            <a:off x="3152394" y="3776472"/>
+            <a:ext cx="393192" cy="402336"/>
+          </a:xfrm>
+          <a:prstGeom prst="rightArrow">
+            <a:avLst/>
+          </a:prstGeom>
+          <a:solidFill>
+            <a:srgbClr val="E3B23C"/>
+          </a:solidFill>
+          <a:ln>
+            <a:noFill/>
+          </a:ln>
+          <a:effectLst/>
+        </p:spPr>
+        <p:style>
+          <a:lnRef idx="1">
+            <a:schemeClr val="accent1"/>
+          </a:lnRef>
+          <a:fillRef idx="3">
+            <a:schemeClr val="accent1"/>
+          </a:fillRef>
+          <a:effectRef idx="2">
+            <a:schemeClr val="accent1"/>
+          </a:effectRef>
+          <a:fontRef idx="minor">
+            <a:schemeClr val="lt1"/>
+          </a:fontRef>
+        </p:style>
+        <p:txBody>
+          <a:bodyPr rtlCol="0" anchor="ctr"/>
+          <a:lstStyle/>
+          <a:p>
+            <a:pPr algn="ctr"/>
+            <a:endParaRPr/>
+          </a:p>
+        </p:txBody>
+      </p:sp>
+      <p:sp>
+        <p:nvSpPr>
+          <p:cNvPr id="10" name="Rounded Rectangle 9"/>
+          <p:cNvSpPr/>
+          <p:nvPr/>
+        </p:nvSpPr>
+        <p:spPr>
+          <a:xfrm>
+            <a:off x="3600450" y="3017520"/>
+            <a:ext cx="2274570" cy="1920240"/>
+          </a:xfrm>
+          <a:prstGeom prst="roundRect">
+            <a:avLst/>
+          </a:prstGeom>
+          <a:solidFill>
+            <a:srgbClr val="FFFFFF"/>
+          </a:solidFill>
+          <a:ln w="15240">
+            <a:solidFill>
+              <a:srgbClr val="EADDC8"/>
+            </a:solidFill>
+          </a:ln>
+          <a:effectLst/>
+        </p:spPr>
+        <p:style>
+          <a:lnRef idx="1">
+            <a:schemeClr val="accent1"/>
+          </a:lnRef>
+          <a:fillRef idx="3">
+            <a:schemeClr val="accent1"/>
+          </a:fillRef>
+          <a:effectRef idx="2">
+            <a:schemeClr val="accent1"/>
+          </a:effectRef>
+          <a:fontRef idx="minor">
+            <a:schemeClr val="lt1"/>
+          </a:fontRef>
+        </p:style>
+        <p:txBody>
+          <a:bodyPr rtlCol="0" anchor="ctr"/>
+          <a:lstStyle/>
+          <a:p>
+            <a:pPr algn="ctr"/>
+            <a:endParaRPr/>
+          </a:p>
+        </p:txBody>
+      </p:sp>
+      <p:sp>
+        <p:nvSpPr>
+          <p:cNvPr id="11" name="Rectangle 10"/>
+          <p:cNvSpPr/>
+          <p:nvPr/>
+        </p:nvSpPr>
+        <p:spPr>
+          <a:xfrm>
+            <a:off x="3600450" y="3017520"/>
+            <a:ext cx="2274570" cy="128016"/>
           </a:xfrm>
           <a:prstGeom prst="rect">
             <a:avLst/>
@@ -6096,19 +6806,20 @@
           <a:lstStyle/>
           <a:p>
             <a:pPr algn="ctr"/>
-          </a:p>
-        </p:txBody>
-      </p:sp>
-      <p:sp>
-        <p:nvSpPr>
-          <p:cNvPr id="3" name="TextBox 2"/>
+            <a:endParaRPr/>
+          </a:p>
+        </p:txBody>
+      </p:sp>
+      <p:sp>
+        <p:nvSpPr>
+          <p:cNvPr id="12" name="TextBox 11"/>
           <p:cNvSpPr txBox="1"/>
           <p:nvPr/>
         </p:nvSpPr>
         <p:spPr>
           <a:xfrm>
-            <a:off x="822960" y="457200"/>
-            <a:ext cx="10515600" cy="457200"/>
+            <a:off x="3737610" y="3474720"/>
+            <a:ext cx="2000250" cy="1280160"/>
           </a:xfrm>
           <a:prstGeom prst="rect">
             <a:avLst/>
@@ -6116,79 +6827,56 @@
           <a:noFill/>
         </p:spPr>
         <p:txBody>
-          <a:bodyPr wrap="square" anchor="t">
+          <a:bodyPr wrap="square" anchor="ctr">
             <a:spAutoFit/>
           </a:bodyPr>
           <a:lstStyle/>
           <a:p>
-            <a:pPr algn="l">
+            <a:pPr algn="ctr">
               <a:spcAft>
                 <a:spcPts val="600"/>
               </a:spcAft>
             </a:pPr>
             <a:r>
-              <a:rPr sz="1800" b="1">
-                <a:solidFill>
-                  <a:srgbClr val="C84B31"/>
-                </a:solidFill>
-                <a:latin typeface="Calibri"/>
-              </a:rPr>
-              <a:t>VOCABULARIO DE DISEÑO, NO PROGRAMACIÓN</a:t>
-            </a:r>
-          </a:p>
-        </p:txBody>
-      </p:sp>
-      <p:sp>
-        <p:nvSpPr>
-          <p:cNvPr id="4" name="TextBox 3"/>
-          <p:cNvSpPr txBox="1"/>
-          <p:nvPr/>
-        </p:nvSpPr>
-        <p:spPr>
-          <a:xfrm>
-            <a:off x="822960" y="914400"/>
-            <a:ext cx="10607040" cy="1005840"/>
-          </a:xfrm>
-          <a:prstGeom prst="rect">
-            <a:avLst/>
-          </a:prstGeom>
-          <a:noFill/>
-        </p:spPr>
-        <p:txBody>
-          <a:bodyPr wrap="square" anchor="t">
-            <a:spAutoFit/>
-          </a:bodyPr>
-          <a:lstStyle/>
-          <a:p>
-            <a:pPr algn="l">
+              <a:rPr sz="1900" b="1">
+                <a:solidFill>
+                  <a:srgbClr val="6D2E46"/>
+                </a:solidFill>
+                <a:latin typeface="Calibri"/>
+              </a:rPr>
+              <a:t>Tocar</a:t>
+            </a:r>
+          </a:p>
+          <a:p>
+            <a:pPr algn="ctr">
               <a:spcAft>
                 <a:spcPts val="600"/>
               </a:spcAft>
             </a:pPr>
             <a:r>
-              <a:rPr sz="3800" b="1">
-                <a:solidFill>
-                  <a:srgbClr val="6D2E46"/>
-                </a:solidFill>
-                <a:latin typeface="Calibri"/>
-              </a:rPr>
-              <a:t>Dónde viven los colores y estilos (PWA)</a:t>
-            </a:r>
-          </a:p>
-        </p:txBody>
-      </p:sp>
-      <p:sp>
-        <p:nvSpPr>
-          <p:cNvPr id="5" name="Rectangle 4"/>
+              <a:rPr sz="1400" b="0">
+                <a:solidFill>
+                  <a:srgbClr val="6F645B"/>
+                </a:solidFill>
+                <a:latin typeface="Calibri"/>
+              </a:rPr>
+              <a:t>una tarjeta</a:t>
+            </a:r>
+          </a:p>
+        </p:txBody>
+      </p:sp>
+      <p:sp>
+        <p:nvSpPr>
+          <p:cNvPr id="13" name="Right Arrow 12"/>
           <p:cNvSpPr/>
           <p:nvPr/>
         </p:nvSpPr>
         <p:spPr>
           <a:xfrm>
-            <a:off x="868680" y="1783080"/>
-            <a:ext cx="1554480" cy="64008"/>
-          </a:xfrm>
-          <a:prstGeom prst="rect">
+            <a:off x="5929884" y="3776472"/>
+            <a:ext cx="393192" cy="402336"/>
+          </a:xfrm>
+          <a:prstGeom prst="rightArrow">
             <a:avLst/>
           </a:prstGeom>
           <a:solidFill>
@@ -6218,19 +6906,112 @@
           <a:lstStyle/>
           <a:p>
             <a:pPr algn="ctr"/>
-          </a:p>
-        </p:txBody>
-      </p:sp>
-      <p:sp>
-        <p:nvSpPr>
-          <p:cNvPr id="6" name="TextBox 5"/>
+            <a:endParaRPr/>
+          </a:p>
+        </p:txBody>
+      </p:sp>
+      <p:sp>
+        <p:nvSpPr>
+          <p:cNvPr id="14" name="Rounded Rectangle 13"/>
+          <p:cNvSpPr/>
+          <p:nvPr/>
+        </p:nvSpPr>
+        <p:spPr>
+          <a:xfrm>
+            <a:off x="6377940" y="3017520"/>
+            <a:ext cx="2274570" cy="1920240"/>
+          </a:xfrm>
+          <a:prstGeom prst="roundRect">
+            <a:avLst/>
+          </a:prstGeom>
+          <a:solidFill>
+            <a:srgbClr val="FFFFFF"/>
+          </a:solidFill>
+          <a:ln w="15240">
+            <a:solidFill>
+              <a:srgbClr val="EADDC8"/>
+            </a:solidFill>
+          </a:ln>
+          <a:effectLst/>
+        </p:spPr>
+        <p:style>
+          <a:lnRef idx="1">
+            <a:schemeClr val="accent1"/>
+          </a:lnRef>
+          <a:fillRef idx="3">
+            <a:schemeClr val="accent1"/>
+          </a:fillRef>
+          <a:effectRef idx="2">
+            <a:schemeClr val="accent1"/>
+          </a:effectRef>
+          <a:fontRef idx="minor">
+            <a:schemeClr val="lt1"/>
+          </a:fontRef>
+        </p:style>
+        <p:txBody>
+          <a:bodyPr rtlCol="0" anchor="ctr"/>
+          <a:lstStyle/>
+          <a:p>
+            <a:pPr algn="ctr"/>
+            <a:endParaRPr/>
+          </a:p>
+        </p:txBody>
+      </p:sp>
+      <p:sp>
+        <p:nvSpPr>
+          <p:cNvPr id="15" name="Rectangle 14"/>
+          <p:cNvSpPr/>
+          <p:nvPr/>
+        </p:nvSpPr>
+        <p:spPr>
+          <a:xfrm>
+            <a:off x="6377940" y="3017520"/>
+            <a:ext cx="2274570" cy="128016"/>
+          </a:xfrm>
+          <a:prstGeom prst="rect">
+            <a:avLst/>
+          </a:prstGeom>
+          <a:solidFill>
+            <a:srgbClr val="4F772D"/>
+          </a:solidFill>
+          <a:ln>
+            <a:noFill/>
+          </a:ln>
+          <a:effectLst/>
+        </p:spPr>
+        <p:style>
+          <a:lnRef idx="1">
+            <a:schemeClr val="accent1"/>
+          </a:lnRef>
+          <a:fillRef idx="3">
+            <a:schemeClr val="accent1"/>
+          </a:fillRef>
+          <a:effectRef idx="2">
+            <a:schemeClr val="accent1"/>
+          </a:effectRef>
+          <a:fontRef idx="minor">
+            <a:schemeClr val="lt1"/>
+          </a:fontRef>
+        </p:style>
+        <p:txBody>
+          <a:bodyPr rtlCol="0" anchor="ctr"/>
+          <a:lstStyle/>
+          <a:p>
+            <a:pPr algn="ctr"/>
+            <a:endParaRPr/>
+          </a:p>
+        </p:txBody>
+      </p:sp>
+      <p:sp>
+        <p:nvSpPr>
+          <p:cNvPr id="16" name="TextBox 15"/>
           <p:cNvSpPr txBox="1"/>
           <p:nvPr/>
         </p:nvSpPr>
         <p:spPr>
           <a:xfrm>
-            <a:off x="896112" y="2103120"/>
-            <a:ext cx="10515600" cy="4480560"/>
+            <a:off x="6515100" y="3474720"/>
+            <a:ext cx="2000250" cy="1280160"/>
           </a:xfrm>
           <a:prstGeom prst="rect">
             <a:avLst/>
@@ -6238,88 +7019,271 @@
           <a:noFill/>
         </p:spPr>
         <p:txBody>
-          <a:bodyPr wrap="square">
+          <a:bodyPr wrap="square" anchor="ctr">
             <a:spAutoFit/>
           </a:bodyPr>
           <a:lstStyle/>
           <a:p>
-            <a:pPr>
+            <a:pPr algn="ctr">
               <a:spcAft>
-                <a:spcPts val="1500"/>
+                <a:spcPts val="600"/>
               </a:spcAft>
             </a:pPr>
             <a:r>
-              <a:rPr sz="2300">
-                <a:solidFill>
-                  <a:srgbClr val="2B2B2B"/>
-                </a:solidFill>
-                <a:latin typeface="Calibri"/>
-              </a:rPr>
-              <a:t>•  La pestaña Code muestra los archivos que generó la IA; no hay que escribirlos, solo saber leerlos</a:t>
-            </a:r>
-          </a:p>
-          <a:p>
-            <a:pPr>
+              <a:rPr sz="1900" b="1">
+                <a:solidFill>
+                  <a:srgbClr val="6D2E46"/>
+                </a:solidFill>
+                <a:latin typeface="Calibri"/>
+              </a:rPr>
+              <a:t>Detalle</a:t>
+            </a:r>
+          </a:p>
+          <a:p>
+            <a:pPr algn="ctr">
               <a:spcAft>
-                <a:spcPts val="1500"/>
+                <a:spcPts val="600"/>
               </a:spcAft>
             </a:pPr>
             <a:r>
-              <a:rPr sz="2300">
-                <a:solidFill>
-                  <a:srgbClr val="2B2B2B"/>
-                </a:solidFill>
-                <a:latin typeface="Calibri"/>
-              </a:rPr>
-              <a:t>•  Los colores suelen vivir juntos (config de estilos): ahí cambias la paleta de toda la app</a:t>
-            </a:r>
-          </a:p>
-          <a:p>
-            <a:pPr>
+              <a:rPr sz="1400" b="0">
+                <a:solidFill>
+                  <a:srgbClr val="6F645B"/>
+                </a:solidFill>
+                <a:latin typeface="Calibri"/>
+              </a:rPr>
+              <a:t>info completa</a:t>
+            </a:r>
+          </a:p>
+        </p:txBody>
+      </p:sp>
+      <p:sp>
+        <p:nvSpPr>
+          <p:cNvPr id="17" name="Right Arrow 16"/>
+          <p:cNvSpPr/>
+          <p:nvPr/>
+        </p:nvSpPr>
+        <p:spPr>
+          <a:xfrm>
+            <a:off x="8707374" y="3776472"/>
+            <a:ext cx="393192" cy="402336"/>
+          </a:xfrm>
+          <a:prstGeom prst="rightArrow">
+            <a:avLst/>
+          </a:prstGeom>
+          <a:solidFill>
+            <a:srgbClr val="E3B23C"/>
+          </a:solidFill>
+          <a:ln>
+            <a:noFill/>
+          </a:ln>
+          <a:effectLst/>
+        </p:spPr>
+        <p:style>
+          <a:lnRef idx="1">
+            <a:schemeClr val="accent1"/>
+          </a:lnRef>
+          <a:fillRef idx="3">
+            <a:schemeClr val="accent1"/>
+          </a:fillRef>
+          <a:effectRef idx="2">
+            <a:schemeClr val="accent1"/>
+          </a:effectRef>
+          <a:fontRef idx="minor">
+            <a:schemeClr val="lt1"/>
+          </a:fontRef>
+        </p:style>
+        <p:txBody>
+          <a:bodyPr rtlCol="0" anchor="ctr"/>
+          <a:lstStyle/>
+          <a:p>
+            <a:pPr algn="ctr"/>
+            <a:endParaRPr/>
+          </a:p>
+        </p:txBody>
+      </p:sp>
+      <p:sp>
+        <p:nvSpPr>
+          <p:cNvPr id="18" name="Rounded Rectangle 17"/>
+          <p:cNvSpPr/>
+          <p:nvPr/>
+        </p:nvSpPr>
+        <p:spPr>
+          <a:xfrm>
+            <a:off x="9155430" y="3017520"/>
+            <a:ext cx="2274570" cy="1920240"/>
+          </a:xfrm>
+          <a:prstGeom prst="roundRect">
+            <a:avLst/>
+          </a:prstGeom>
+          <a:solidFill>
+            <a:srgbClr val="FFFFFF"/>
+          </a:solidFill>
+          <a:ln w="15240">
+            <a:solidFill>
+              <a:srgbClr val="EADDC8"/>
+            </a:solidFill>
+          </a:ln>
+          <a:effectLst/>
+        </p:spPr>
+        <p:style>
+          <a:lnRef idx="1">
+            <a:schemeClr val="accent1"/>
+          </a:lnRef>
+          <a:fillRef idx="3">
+            <a:schemeClr val="accent1"/>
+          </a:fillRef>
+          <a:effectRef idx="2">
+            <a:schemeClr val="accent1"/>
+          </a:effectRef>
+          <a:fontRef idx="minor">
+            <a:schemeClr val="lt1"/>
+          </a:fontRef>
+        </p:style>
+        <p:txBody>
+          <a:bodyPr rtlCol="0" anchor="ctr"/>
+          <a:lstStyle/>
+          <a:p>
+            <a:pPr algn="ctr"/>
+            <a:endParaRPr/>
+          </a:p>
+        </p:txBody>
+      </p:sp>
+      <p:sp>
+        <p:nvSpPr>
+          <p:cNvPr id="19" name="Rectangle 18"/>
+          <p:cNvSpPr/>
+          <p:nvPr/>
+        </p:nvSpPr>
+        <p:spPr>
+          <a:xfrm>
+            <a:off x="9155430" y="3017520"/>
+            <a:ext cx="2274570" cy="128016"/>
+          </a:xfrm>
+          <a:prstGeom prst="rect">
+            <a:avLst/>
+          </a:prstGeom>
+          <a:solidFill>
+            <a:srgbClr val="3A6B7E"/>
+          </a:solidFill>
+          <a:ln>
+            <a:noFill/>
+          </a:ln>
+          <a:effectLst/>
+        </p:spPr>
+        <p:style>
+          <a:lnRef idx="1">
+            <a:schemeClr val="accent1"/>
+          </a:lnRef>
+          <a:fillRef idx="3">
+            <a:schemeClr val="accent1"/>
+          </a:fillRef>
+          <a:effectRef idx="2">
+            <a:schemeClr val="accent1"/>
+          </a:effectRef>
+          <a:fontRef idx="minor">
+            <a:schemeClr val="lt1"/>
+          </a:fontRef>
+        </p:style>
+        <p:txBody>
+          <a:bodyPr rtlCol="0" anchor="ctr"/>
+          <a:lstStyle/>
+          <a:p>
+            <a:pPr algn="ctr"/>
+            <a:endParaRPr/>
+          </a:p>
+        </p:txBody>
+      </p:sp>
+      <p:sp>
+        <p:nvSpPr>
+          <p:cNvPr id="20" name="TextBox 19"/>
+          <p:cNvSpPr txBox="1"/>
+          <p:nvPr/>
+        </p:nvSpPr>
+        <p:spPr>
+          <a:xfrm>
+            <a:off x="9292590" y="3474720"/>
+            <a:ext cx="2000250" cy="1280160"/>
+          </a:xfrm>
+          <a:prstGeom prst="rect">
+            <a:avLst/>
+          </a:prstGeom>
+          <a:noFill/>
+        </p:spPr>
+        <p:txBody>
+          <a:bodyPr wrap="square" anchor="ctr">
+            <a:spAutoFit/>
+          </a:bodyPr>
+          <a:lstStyle/>
+          <a:p>
+            <a:pPr algn="ctr">
               <a:spcAft>
-                <a:spcPts val="1500"/>
+                <a:spcPts val="600"/>
               </a:spcAft>
             </a:pPr>
             <a:r>
-              <a:rPr sz="2300">
-                <a:solidFill>
-                  <a:srgbClr val="2B2B2B"/>
-                </a:solidFill>
-                <a:latin typeface="Calibri"/>
-              </a:rPr>
-              <a:t>•  La tipografía y los tamaños se definen una vez y se reutilizan: consistencia por diseño</a:t>
-            </a:r>
-          </a:p>
-          <a:p>
-            <a:pPr>
+              <a:rPr sz="1900" b="1">
+                <a:solidFill>
+                  <a:srgbClr val="6D2E46"/>
+                </a:solidFill>
+                <a:latin typeface="Calibri"/>
+              </a:rPr>
+              <a:t>Volver</a:t>
+            </a:r>
+          </a:p>
+          <a:p>
+            <a:pPr algn="ctr">
               <a:spcAft>
-                <a:spcPts val="1500"/>
+                <a:spcPts val="600"/>
               </a:spcAft>
             </a:pPr>
             <a:r>
-              <a:rPr sz="2300">
-                <a:solidFill>
-                  <a:srgbClr val="2B2B2B"/>
-                </a:solidFill>
-                <a:latin typeface="Calibri"/>
-              </a:rPr>
-              <a:t>•  Puedes ajustar a mano un valor (por ejemplo un hexadecimal) y ver el cambio en la vista previa</a:t>
-            </a:r>
-          </a:p>
-          <a:p>
-            <a:pPr>
+              <a:rPr sz="1400" b="0">
+                <a:solidFill>
+                  <a:srgbClr val="6F645B"/>
+                </a:solidFill>
+                <a:latin typeface="Calibri"/>
+              </a:rPr>
+              <a:t>a la lista</a:t>
+            </a:r>
+          </a:p>
+        </p:txBody>
+      </p:sp>
+      <p:sp>
+        <p:nvSpPr>
+          <p:cNvPr id="21" name="TextBox 20"/>
+          <p:cNvSpPr txBox="1"/>
+          <p:nvPr/>
+        </p:nvSpPr>
+        <p:spPr>
+          <a:xfrm>
+            <a:off x="868680" y="5394960"/>
+            <a:ext cx="10424160" cy="731520"/>
+          </a:xfrm>
+          <a:prstGeom prst="rect">
+            <a:avLst/>
+          </a:prstGeom>
+          <a:noFill/>
+        </p:spPr>
+        <p:txBody>
+          <a:bodyPr wrap="square" anchor="t">
+            <a:spAutoFit/>
+          </a:bodyPr>
+          <a:lstStyle/>
+          <a:p>
+            <a:pPr algn="l">
               <a:spcAft>
-                <a:spcPts val="1500"/>
+                <a:spcPts val="600"/>
               </a:spcAft>
             </a:pPr>
             <a:r>
-              <a:rPr sz="2300">
+              <a:rPr sz="1700" b="0">
                 <a:solidFill>
                   <a:srgbClr val="2B2B2B"/>
                 </a:solidFill>
                 <a:latin typeface="Calibri"/>
               </a:rPr>
-              <a:t>•  Aun así, lo normal es pedir el cambio por prompt; editar a mano es solo para retoques finos</a:t>
+              <a:t>Este mismo patrón lo usarás en casi todas las apps: una pantalla que muestra muchos elementos y otra que muestra uno a fondo.</a:t>
             </a:r>
           </a:p>
         </p:txBody>
@@ -6332,8 +7296,8 @@
 </p:sld>
 </file>
 
-<file path=ppt/slides/slide8.xml><?xml version="1.0" encoding="utf-8"?>
-<p:sld xmlns:a="http://schemas.openxmlformats.org/drawingml/2006/main" xmlns:p="http://schemas.openxmlformats.org/presentationml/2006/main" xmlns:r="http://schemas.openxmlformats.org/officeDocument/2006/relationships">
+<file path=ppt/slides/slide9.xml><?xml version="1.0" encoding="utf-8"?>
+<p:sld xmlns:a="http://schemas.openxmlformats.org/drawingml/2006/main" xmlns:r="http://schemas.openxmlformats.org/officeDocument/2006/relationships" xmlns:p="http://schemas.openxmlformats.org/presentationml/2006/main">
   <p:cSld>
     <p:bg>
       <p:bgPr>
@@ -6349,7 +7313,14 @@
         <p:cNvGrpSpPr/>
         <p:nvPr/>
       </p:nvGrpSpPr>
-      <p:grpSpPr/>
+      <p:grpSpPr>
+        <a:xfrm>
+          <a:off x="0" y="0"/>
+          <a:ext cx="0" cy="0"/>
+          <a:chOff x="0" y="0"/>
+          <a:chExt cx="0" cy="0"/>
+        </a:xfrm>
+      </p:grpSpPr>
       <p:sp>
         <p:nvSpPr>
           <p:cNvPr id="2" name="Rectangle 1"/>
@@ -6365,7 +7336,7 @@
             <a:avLst/>
           </a:prstGeom>
           <a:solidFill>
-            <a:srgbClr val="4F772D"/>
+            <a:srgbClr val="C84B31"/>
           </a:solidFill>
           <a:ln>
             <a:noFill/>
@@ -6391,6 +7362,7 @@
           <a:lstStyle/>
           <a:p>
             <a:pPr algn="ctr"/>
+            <a:endParaRPr/>
           </a:p>
         </p:txBody>
       </p:sp>
@@ -6428,7 +7400,7 @@
                 </a:solidFill>
                 <a:latin typeface="Calibri"/>
               </a:rPr>
-              <a:t>DEMO DEL DOCENTE · EN VIVO</a:t>
+              <a:t>LO QUE AGREGAMOS HOY</a:t>
             </a:r>
           </a:p>
         </p:txBody>
@@ -6467,7 +7439,7 @@
                 </a:solidFill>
                 <a:latin typeface="Calibri"/>
               </a:rPr>
-              <a:t>Adopta un Peludo</a:t>
+              <a:t>Lista y detalle en Ruta del Café</a:t>
             </a:r>
           </a:p>
         </p:txBody>
@@ -6513,6 +7485,7 @@
           <a:lstStyle/>
           <a:p>
             <a:pPr algn="ctr"/>
+            <a:endParaRPr/>
           </a:p>
         </p:txBody>
       </p:sp>
@@ -6524,201 +7497,8 @@
         </p:nvSpPr>
         <p:spPr>
           <a:xfrm>
-            <a:off x="896112" y="2148840"/>
-            <a:ext cx="6583680" cy="566928"/>
-          </a:xfrm>
-          <a:prstGeom prst="roundRect">
-            <a:avLst/>
-          </a:prstGeom>
-          <a:solidFill>
-            <a:srgbClr val="F6ECDD"/>
-          </a:solidFill>
-          <a:ln>
-            <a:noFill/>
-          </a:ln>
-          <a:effectLst/>
-        </p:spPr>
-        <p:style>
-          <a:lnRef idx="1">
-            <a:schemeClr val="accent1"/>
-          </a:lnRef>
-          <a:fillRef idx="3">
-            <a:schemeClr val="accent1"/>
-          </a:fillRef>
-          <a:effectRef idx="2">
-            <a:schemeClr val="accent1"/>
-          </a:effectRef>
-          <a:fontRef idx="minor">
-            <a:schemeClr val="lt1"/>
-          </a:fontRef>
-        </p:style>
-        <p:txBody>
-          <a:bodyPr rtlCol="0" anchor="ctr"/>
-          <a:lstStyle/>
-          <a:p>
-            <a:pPr algn="ctr"/>
-          </a:p>
-        </p:txBody>
-      </p:sp>
-      <p:sp>
-        <p:nvSpPr>
-          <p:cNvPr id="7" name="TextBox 6"/>
-          <p:cNvSpPr txBox="1"/>
-          <p:nvPr/>
-        </p:nvSpPr>
-        <p:spPr>
-          <a:xfrm>
-            <a:off x="1170432" y="2240280"/>
-            <a:ext cx="6035040" cy="457200"/>
-          </a:xfrm>
-          <a:prstGeom prst="rect">
-            <a:avLst/>
-          </a:prstGeom>
-          <a:noFill/>
-        </p:spPr>
-        <p:txBody>
-          <a:bodyPr wrap="square" anchor="ctr">
-            <a:spAutoFit/>
-          </a:bodyPr>
-          <a:lstStyle/>
-          <a:p>
-            <a:pPr algn="l">
-              <a:spcAft>
-                <a:spcPts val="600"/>
-              </a:spcAft>
-            </a:pPr>
-            <a:r>
-              <a:rPr sz="1700" b="1">
-                <a:solidFill>
-                  <a:srgbClr val="6D2E46"/>
-                </a:solidFill>
-                <a:latin typeface="Calibri"/>
-              </a:rPr>
-              <a:t>El docente la construye en vivo — no es tu entrega</a:t>
-            </a:r>
-          </a:p>
-        </p:txBody>
-      </p:sp>
-      <p:sp>
-        <p:nvSpPr>
-          <p:cNvPr id="8" name="TextBox 7"/>
-          <p:cNvSpPr txBox="1"/>
-          <p:nvPr/>
-        </p:nvSpPr>
-        <p:spPr>
-          <a:xfrm>
-            <a:off x="896112" y="2971800"/>
-            <a:ext cx="6583680" cy="2103120"/>
-          </a:xfrm>
-          <a:prstGeom prst="rect">
-            <a:avLst/>
-          </a:prstGeom>
-          <a:noFill/>
-        </p:spPr>
-        <p:txBody>
-          <a:bodyPr wrap="square">
-            <a:spAutoFit/>
-          </a:bodyPr>
-          <a:lstStyle/>
-          <a:p>
-            <a:pPr>
-              <a:spcAft>
-                <a:spcPts val="1400"/>
-              </a:spcAft>
-            </a:pPr>
-            <a:r>
-              <a:rPr sz="2200">
-                <a:solidFill>
-                  <a:srgbClr val="2B2B2B"/>
-                </a:solidFill>
-                <a:latin typeface="Calibri"/>
-              </a:rPr>
-              <a:t>•  Mascotas en adopción, con su ficha de detalle (PWA)</a:t>
-            </a:r>
-          </a:p>
-          <a:p>
-            <a:pPr>
-              <a:spcAft>
-                <a:spcPts val="1400"/>
-              </a:spcAft>
-            </a:pPr>
-            <a:r>
-              <a:rPr sz="2200">
-                <a:solidFill>
-                  <a:srgbClr val="2B2B2B"/>
-                </a:solidFill>
-                <a:latin typeface="Calibri"/>
-              </a:rPr>
-              <a:t>•  Ilustra el flujo lista → detalle → volver y una identidad visual propia</a:t>
-            </a:r>
-          </a:p>
-          <a:p>
-            <a:pPr>
-              <a:spcAft>
-                <a:spcPts val="1400"/>
-              </a:spcAft>
-            </a:pPr>
-            <a:r>
-              <a:rPr sz="2200">
-                <a:solidFill>
-                  <a:srgbClr val="2B2B2B"/>
-                </a:solidFill>
-                <a:latin typeface="Calibri"/>
-              </a:rPr>
-              <a:t>•  El docente la construye y la pule en vivo con el modo de anotación</a:t>
-            </a:r>
-          </a:p>
-        </p:txBody>
-      </p:sp>
-      <p:sp>
-        <p:nvSpPr>
-          <p:cNvPr id="9" name="TextBox 8"/>
-          <p:cNvSpPr txBox="1"/>
-          <p:nvPr/>
-        </p:nvSpPr>
-        <p:spPr>
-          <a:xfrm>
-            <a:off x="896112" y="5257800"/>
-            <a:ext cx="6583680" cy="1188720"/>
-          </a:xfrm>
-          <a:prstGeom prst="rect">
-            <a:avLst/>
-          </a:prstGeom>
-          <a:noFill/>
-        </p:spPr>
-        <p:txBody>
-          <a:bodyPr wrap="square" anchor="t">
-            <a:spAutoFit/>
-          </a:bodyPr>
-          <a:lstStyle/>
-          <a:p>
-            <a:pPr algn="l">
-              <a:spcAft>
-                <a:spcPts val="600"/>
-              </a:spcAft>
-            </a:pPr>
-            <a:r>
-              <a:rPr sz="1500" b="0">
-                <a:solidFill>
-                  <a:srgbClr val="6F645B"/>
-                </a:solidFill>
-                <a:latin typeface="Calibri"/>
-              </a:rPr>
-              <a:t>Ilustra el concepto del día con una app distinta. Tu laboratorio sigue en la app insignia y en tu propia idea.</a:t>
-            </a:r>
-          </a:p>
-        </p:txBody>
-      </p:sp>
-      <p:sp>
-        <p:nvSpPr>
-          <p:cNvPr id="10" name="Rounded Rectangle 9"/>
-          <p:cNvSpPr/>
-          <p:nvPr/>
-        </p:nvSpPr>
-        <p:spPr>
-          <a:xfrm>
-            <a:off x="7772400" y="3202083"/>
-            <a:ext cx="3749040" cy="2099754"/>
+            <a:off x="3657801" y="1956816"/>
+            <a:ext cx="1989990" cy="4178808"/>
           </a:xfrm>
           <a:prstGeom prst="roundRect">
             <a:avLst/>
@@ -6752,12 +7532,13 @@
           <a:lstStyle/>
           <a:p>
             <a:pPr algn="ctr"/>
+            <a:endParaRPr/>
           </a:p>
         </p:txBody>
       </p:sp>
       <p:pic>
         <p:nvPicPr>
-          <p:cNvPr id="11" name="Picture 10" descr="demo-adopta.png"/>
+          <p:cNvPr id="7" name="Picture 6" descr="ruta-home.png"/>
           <p:cNvPicPr>
             <a:picLocks noChangeAspect="1"/>
           </p:cNvPicPr>
@@ -6771,8 +7552,8 @@
         </p:blipFill>
         <p:spPr>
           <a:xfrm>
-            <a:off x="7818120" y="3247803"/>
-            <a:ext cx="3657600" cy="2008314"/>
+            <a:off x="3712665" y="2011680"/>
+            <a:ext cx="1880262" cy="4069080"/>
           </a:xfrm>
           <a:prstGeom prst="rect">
             <a:avLst/>
@@ -6781,14 +7562,14 @@
       </p:pic>
       <p:sp>
         <p:nvSpPr>
-          <p:cNvPr id="12" name="TextBox 11"/>
+          <p:cNvPr id="8" name="TextBox 7"/>
           <p:cNvSpPr txBox="1"/>
           <p:nvPr/>
         </p:nvSpPr>
         <p:spPr>
           <a:xfrm>
-            <a:off x="7818120" y="6419088"/>
-            <a:ext cx="3657600" cy="365760"/>
+            <a:off x="2889705" y="6208776"/>
+            <a:ext cx="3526182" cy="457200"/>
           </a:xfrm>
           <a:prstGeom prst="rect">
             <a:avLst/>
@@ -6807,62 +7588,38 @@
               </a:spcAft>
             </a:pPr>
             <a:r>
-              <a:rPr sz="1200" b="1">
+              <a:rPr sz="1300" b="1">
                 <a:solidFill>
                   <a:srgbClr val="6D2E46"/>
                 </a:solidFill>
                 <a:latin typeface="Calibri"/>
               </a:rPr>
-              <a:t>Captura real de la demo</a:t>
-            </a:r>
-          </a:p>
-        </p:txBody>
-      </p:sp>
-    </p:spTree>
-  </p:cSld>
-  <p:clrMapOvr>
-    <a:masterClrMapping/>
-  </p:clrMapOvr>
-</p:sld>
-</file>
-
-<file path=ppt/slides/slide9.xml><?xml version="1.0" encoding="utf-8"?>
-<p:sld xmlns:a="http://schemas.openxmlformats.org/drawingml/2006/main" xmlns:p="http://schemas.openxmlformats.org/presentationml/2006/main" xmlns:r="http://schemas.openxmlformats.org/officeDocument/2006/relationships">
-  <p:cSld>
-    <p:bg>
-      <p:bgPr>
-        <a:solidFill>
-          <a:srgbClr val="FDF6EC"/>
-        </a:solidFill>
-        <a:effectLst/>
-      </p:bgPr>
-    </p:bg>
-    <p:spTree>
-      <p:nvGrpSpPr>
-        <p:cNvPr id="1" name=""/>
-        <p:cNvGrpSpPr/>
-        <p:nvPr/>
-      </p:nvGrpSpPr>
-      <p:grpSpPr/>
-      <p:sp>
-        <p:nvSpPr>
-          <p:cNvPr id="2" name="Rectangle 1"/>
+              <a:t>Lista con filtro</a:t>
+            </a:r>
+          </a:p>
+        </p:txBody>
+      </p:sp>
+      <p:sp>
+        <p:nvSpPr>
+          <p:cNvPr id="9" name="Rounded Rectangle 8"/>
           <p:cNvSpPr/>
           <p:nvPr/>
         </p:nvSpPr>
         <p:spPr>
           <a:xfrm>
-            <a:off x="0" y="0"/>
-            <a:ext cx="12191695" cy="146304"/>
-          </a:xfrm>
-          <a:prstGeom prst="rect">
+            <a:off x="6543903" y="1956816"/>
+            <a:ext cx="1989990" cy="4178808"/>
+          </a:xfrm>
+          <a:prstGeom prst="roundRect">
             <a:avLst/>
           </a:prstGeom>
           <a:solidFill>
-            <a:srgbClr val="4F772D"/>
+            <a:srgbClr val="FFFFFF"/>
           </a:solidFill>
-          <a:ln>
-            <a:noFill/>
+          <a:ln w="15240">
+            <a:solidFill>
+              <a:srgbClr val="6D2E46"/>
+            </a:solidFill>
           </a:ln>
           <a:effectLst/>
         </p:spPr>
@@ -6885,19 +7642,44 @@
           <a:lstStyle/>
           <a:p>
             <a:pPr algn="ctr"/>
-          </a:p>
-        </p:txBody>
-      </p:sp>
-      <p:sp>
-        <p:nvSpPr>
-          <p:cNvPr id="3" name="TextBox 2"/>
+            <a:endParaRPr/>
+          </a:p>
+        </p:txBody>
+      </p:sp>
+      <p:pic>
+        <p:nvPicPr>
+          <p:cNvPr id="10" name="Picture 9" descr="ruta-detalle.png"/>
+          <p:cNvPicPr>
+            <a:picLocks noChangeAspect="1"/>
+          </p:cNvPicPr>
+          <p:nvPr/>
+        </p:nvPicPr>
+        <p:blipFill>
+          <a:blip r:embed="rId3"/>
+          <a:stretch>
+            <a:fillRect/>
+          </a:stretch>
+        </p:blipFill>
+        <p:spPr>
+          <a:xfrm>
+            <a:off x="6598767" y="2011680"/>
+            <a:ext cx="1880262" cy="4069080"/>
+          </a:xfrm>
+          <a:prstGeom prst="rect">
+            <a:avLst/>
+          </a:prstGeom>
+        </p:spPr>
+      </p:pic>
+      <p:sp>
+        <p:nvSpPr>
+          <p:cNvPr id="11" name="TextBox 10"/>
           <p:cNvSpPr txBox="1"/>
           <p:nvPr/>
         </p:nvSpPr>
         <p:spPr>
           <a:xfrm>
-            <a:off x="822960" y="457200"/>
-            <a:ext cx="10515600" cy="457200"/>
+            <a:off x="5775807" y="6208776"/>
+            <a:ext cx="3526182" cy="457200"/>
           </a:xfrm>
           <a:prstGeom prst="rect">
             <a:avLst/>
@@ -6906,218 +7688,6 @@
         </p:spPr>
         <p:txBody>
           <a:bodyPr wrap="square" anchor="t">
-            <a:spAutoFit/>
-          </a:bodyPr>
-          <a:lstStyle/>
-          <a:p>
-            <a:pPr algn="l">
-              <a:spcAft>
-                <a:spcPts val="600"/>
-              </a:spcAft>
-            </a:pPr>
-            <a:r>
-              <a:rPr sz="1800" b="1">
-                <a:solidFill>
-                  <a:srgbClr val="C84B31"/>
-                </a:solidFill>
-                <a:latin typeface="Calibri"/>
-              </a:rPr>
-              <a:t>LISTA → DETALLE → VOLVER</a:t>
-            </a:r>
-          </a:p>
-        </p:txBody>
-      </p:sp>
-      <p:sp>
-        <p:nvSpPr>
-          <p:cNvPr id="4" name="TextBox 3"/>
-          <p:cNvSpPr txBox="1"/>
-          <p:nvPr/>
-        </p:nvSpPr>
-        <p:spPr>
-          <a:xfrm>
-            <a:off x="822960" y="914400"/>
-            <a:ext cx="10607040" cy="1005840"/>
-          </a:xfrm>
-          <a:prstGeom prst="rect">
-            <a:avLst/>
-          </a:prstGeom>
-          <a:noFill/>
-        </p:spPr>
-        <p:txBody>
-          <a:bodyPr wrap="square" anchor="t">
-            <a:spAutoFit/>
-          </a:bodyPr>
-          <a:lstStyle/>
-          <a:p>
-            <a:pPr algn="l">
-              <a:spcAft>
-                <a:spcPts val="600"/>
-              </a:spcAft>
-            </a:pPr>
-            <a:r>
-              <a:rPr sz="3800" b="1">
-                <a:solidFill>
-                  <a:srgbClr val="6D2E46"/>
-                </a:solidFill>
-                <a:latin typeface="Calibri"/>
-              </a:rPr>
-              <a:t>La navegación de un prototipo</a:t>
-            </a:r>
-          </a:p>
-        </p:txBody>
-      </p:sp>
-      <p:sp>
-        <p:nvSpPr>
-          <p:cNvPr id="5" name="Rectangle 4"/>
-          <p:cNvSpPr/>
-          <p:nvPr/>
-        </p:nvSpPr>
-        <p:spPr>
-          <a:xfrm>
-            <a:off x="868680" y="1783080"/>
-            <a:ext cx="1554480" cy="64008"/>
-          </a:xfrm>
-          <a:prstGeom prst="rect">
-            <a:avLst/>
-          </a:prstGeom>
-          <a:solidFill>
-            <a:srgbClr val="E3B23C"/>
-          </a:solidFill>
-          <a:ln>
-            <a:noFill/>
-          </a:ln>
-          <a:effectLst/>
-        </p:spPr>
-        <p:style>
-          <a:lnRef idx="1">
-            <a:schemeClr val="accent1"/>
-          </a:lnRef>
-          <a:fillRef idx="3">
-            <a:schemeClr val="accent1"/>
-          </a:fillRef>
-          <a:effectRef idx="2">
-            <a:schemeClr val="accent1"/>
-          </a:effectRef>
-          <a:fontRef idx="minor">
-            <a:schemeClr val="lt1"/>
-          </a:fontRef>
-        </p:style>
-        <p:txBody>
-          <a:bodyPr rtlCol="0" anchor="ctr"/>
-          <a:lstStyle/>
-          <a:p>
-            <a:pPr algn="ctr"/>
-          </a:p>
-        </p:txBody>
-      </p:sp>
-      <p:sp>
-        <p:nvSpPr>
-          <p:cNvPr id="6" name="Rounded Rectangle 5"/>
-          <p:cNvSpPr/>
-          <p:nvPr/>
-        </p:nvSpPr>
-        <p:spPr>
-          <a:xfrm>
-            <a:off x="822960" y="3017520"/>
-            <a:ext cx="2274570" cy="1920240"/>
-          </a:xfrm>
-          <a:prstGeom prst="roundRect">
-            <a:avLst/>
-          </a:prstGeom>
-          <a:solidFill>
-            <a:srgbClr val="FFFFFF"/>
-          </a:solidFill>
-          <a:ln w="15240">
-            <a:solidFill>
-              <a:srgbClr val="EADDC8"/>
-            </a:solidFill>
-          </a:ln>
-          <a:effectLst/>
-        </p:spPr>
-        <p:style>
-          <a:lnRef idx="1">
-            <a:schemeClr val="accent1"/>
-          </a:lnRef>
-          <a:fillRef idx="3">
-            <a:schemeClr val="accent1"/>
-          </a:fillRef>
-          <a:effectRef idx="2">
-            <a:schemeClr val="accent1"/>
-          </a:effectRef>
-          <a:fontRef idx="minor">
-            <a:schemeClr val="lt1"/>
-          </a:fontRef>
-        </p:style>
-        <p:txBody>
-          <a:bodyPr rtlCol="0" anchor="ctr"/>
-          <a:lstStyle/>
-          <a:p>
-            <a:pPr algn="ctr"/>
-          </a:p>
-        </p:txBody>
-      </p:sp>
-      <p:sp>
-        <p:nvSpPr>
-          <p:cNvPr id="7" name="Rectangle 6"/>
-          <p:cNvSpPr/>
-          <p:nvPr/>
-        </p:nvSpPr>
-        <p:spPr>
-          <a:xfrm>
-            <a:off x="822960" y="3017520"/>
-            <a:ext cx="2274570" cy="128016"/>
-          </a:xfrm>
-          <a:prstGeom prst="rect">
-            <a:avLst/>
-          </a:prstGeom>
-          <a:solidFill>
-            <a:srgbClr val="6D2E46"/>
-          </a:solidFill>
-          <a:ln>
-            <a:noFill/>
-          </a:ln>
-          <a:effectLst/>
-        </p:spPr>
-        <p:style>
-          <a:lnRef idx="1">
-            <a:schemeClr val="accent1"/>
-          </a:lnRef>
-          <a:fillRef idx="3">
-            <a:schemeClr val="accent1"/>
-          </a:fillRef>
-          <a:effectRef idx="2">
-            <a:schemeClr val="accent1"/>
-          </a:effectRef>
-          <a:fontRef idx="minor">
-            <a:schemeClr val="lt1"/>
-          </a:fontRef>
-        </p:style>
-        <p:txBody>
-          <a:bodyPr rtlCol="0" anchor="ctr"/>
-          <a:lstStyle/>
-          <a:p>
-            <a:pPr algn="ctr"/>
-          </a:p>
-        </p:txBody>
-      </p:sp>
-      <p:sp>
-        <p:nvSpPr>
-          <p:cNvPr id="8" name="TextBox 7"/>
-          <p:cNvSpPr txBox="1"/>
-          <p:nvPr/>
-        </p:nvSpPr>
-        <p:spPr>
-          <a:xfrm>
-            <a:off x="960120" y="3474720"/>
-            <a:ext cx="2000250" cy="1280160"/>
-          </a:xfrm>
-          <a:prstGeom prst="rect">
-            <a:avLst/>
-          </a:prstGeom>
-          <a:noFill/>
-        </p:spPr>
-        <p:txBody>
-          <a:bodyPr wrap="square" anchor="ctr">
             <a:spAutoFit/>
           </a:bodyPr>
           <a:lstStyle/>
@@ -7128,635 +7698,13 @@
               </a:spcAft>
             </a:pPr>
             <a:r>
-              <a:rPr sz="1900" b="1">
+              <a:rPr sz="1300" b="1">
                 <a:solidFill>
                   <a:srgbClr val="6D2E46"/>
                 </a:solidFill>
                 <a:latin typeface="Calibri"/>
               </a:rPr>
-              <a:t>Lista</a:t>
-            </a:r>
-          </a:p>
-          <a:p>
-            <a:pPr algn="ctr">
-              <a:spcAft>
-                <a:spcPts val="600"/>
-              </a:spcAft>
-            </a:pPr>
-            <a:r>
-              <a:rPr sz="1400" b="0">
-                <a:solidFill>
-                  <a:srgbClr val="6F645B"/>
-                </a:solidFill>
-                <a:latin typeface="Calibri"/>
-              </a:rPr>
-              <a:t>tarjetas</a:t>
-            </a:r>
-          </a:p>
-        </p:txBody>
-      </p:sp>
-      <p:sp>
-        <p:nvSpPr>
-          <p:cNvPr id="9" name="Right Arrow 8"/>
-          <p:cNvSpPr/>
-          <p:nvPr/>
-        </p:nvSpPr>
-        <p:spPr>
-          <a:xfrm>
-            <a:off x="3152394" y="3776472"/>
-            <a:ext cx="393192" cy="402336"/>
-          </a:xfrm>
-          <a:prstGeom prst="rightArrow">
-            <a:avLst/>
-          </a:prstGeom>
-          <a:solidFill>
-            <a:srgbClr val="E3B23C"/>
-          </a:solidFill>
-          <a:ln>
-            <a:noFill/>
-          </a:ln>
-          <a:effectLst/>
-        </p:spPr>
-        <p:style>
-          <a:lnRef idx="1">
-            <a:schemeClr val="accent1"/>
-          </a:lnRef>
-          <a:fillRef idx="3">
-            <a:schemeClr val="accent1"/>
-          </a:fillRef>
-          <a:effectRef idx="2">
-            <a:schemeClr val="accent1"/>
-          </a:effectRef>
-          <a:fontRef idx="minor">
-            <a:schemeClr val="lt1"/>
-          </a:fontRef>
-        </p:style>
-        <p:txBody>
-          <a:bodyPr rtlCol="0" anchor="ctr"/>
-          <a:lstStyle/>
-          <a:p>
-            <a:pPr algn="ctr"/>
-          </a:p>
-        </p:txBody>
-      </p:sp>
-      <p:sp>
-        <p:nvSpPr>
-          <p:cNvPr id="10" name="Rounded Rectangle 9"/>
-          <p:cNvSpPr/>
-          <p:nvPr/>
-        </p:nvSpPr>
-        <p:spPr>
-          <a:xfrm>
-            <a:off x="3600450" y="3017520"/>
-            <a:ext cx="2274570" cy="1920240"/>
-          </a:xfrm>
-          <a:prstGeom prst="roundRect">
-            <a:avLst/>
-          </a:prstGeom>
-          <a:solidFill>
-            <a:srgbClr val="FFFFFF"/>
-          </a:solidFill>
-          <a:ln w="15240">
-            <a:solidFill>
-              <a:srgbClr val="EADDC8"/>
-            </a:solidFill>
-          </a:ln>
-          <a:effectLst/>
-        </p:spPr>
-        <p:style>
-          <a:lnRef idx="1">
-            <a:schemeClr val="accent1"/>
-          </a:lnRef>
-          <a:fillRef idx="3">
-            <a:schemeClr val="accent1"/>
-          </a:fillRef>
-          <a:effectRef idx="2">
-            <a:schemeClr val="accent1"/>
-          </a:effectRef>
-          <a:fontRef idx="minor">
-            <a:schemeClr val="lt1"/>
-          </a:fontRef>
-        </p:style>
-        <p:txBody>
-          <a:bodyPr rtlCol="0" anchor="ctr"/>
-          <a:lstStyle/>
-          <a:p>
-            <a:pPr algn="ctr"/>
-          </a:p>
-        </p:txBody>
-      </p:sp>
-      <p:sp>
-        <p:nvSpPr>
-          <p:cNvPr id="11" name="Rectangle 10"/>
-          <p:cNvSpPr/>
-          <p:nvPr/>
-        </p:nvSpPr>
-        <p:spPr>
-          <a:xfrm>
-            <a:off x="3600450" y="3017520"/>
-            <a:ext cx="2274570" cy="128016"/>
-          </a:xfrm>
-          <a:prstGeom prst="rect">
-            <a:avLst/>
-          </a:prstGeom>
-          <a:solidFill>
-            <a:srgbClr val="C84B31"/>
-          </a:solidFill>
-          <a:ln>
-            <a:noFill/>
-          </a:ln>
-          <a:effectLst/>
-        </p:spPr>
-        <p:style>
-          <a:lnRef idx="1">
-            <a:schemeClr val="accent1"/>
-          </a:lnRef>
-          <a:fillRef idx="3">
-            <a:schemeClr val="accent1"/>
-          </a:fillRef>
-          <a:effectRef idx="2">
-            <a:schemeClr val="accent1"/>
-          </a:effectRef>
-          <a:fontRef idx="minor">
-            <a:schemeClr val="lt1"/>
-          </a:fontRef>
-        </p:style>
-        <p:txBody>
-          <a:bodyPr rtlCol="0" anchor="ctr"/>
-          <a:lstStyle/>
-          <a:p>
-            <a:pPr algn="ctr"/>
-          </a:p>
-        </p:txBody>
-      </p:sp>
-      <p:sp>
-        <p:nvSpPr>
-          <p:cNvPr id="12" name="TextBox 11"/>
-          <p:cNvSpPr txBox="1"/>
-          <p:nvPr/>
-        </p:nvSpPr>
-        <p:spPr>
-          <a:xfrm>
-            <a:off x="3737610" y="3474720"/>
-            <a:ext cx="2000250" cy="1280160"/>
-          </a:xfrm>
-          <a:prstGeom prst="rect">
-            <a:avLst/>
-          </a:prstGeom>
-          <a:noFill/>
-        </p:spPr>
-        <p:txBody>
-          <a:bodyPr wrap="square" anchor="ctr">
-            <a:spAutoFit/>
-          </a:bodyPr>
-          <a:lstStyle/>
-          <a:p>
-            <a:pPr algn="ctr">
-              <a:spcAft>
-                <a:spcPts val="600"/>
-              </a:spcAft>
-            </a:pPr>
-            <a:r>
-              <a:rPr sz="1900" b="1">
-                <a:solidFill>
-                  <a:srgbClr val="6D2E46"/>
-                </a:solidFill>
-                <a:latin typeface="Calibri"/>
-              </a:rPr>
-              <a:t>Tocar</a:t>
-            </a:r>
-          </a:p>
-          <a:p>
-            <a:pPr algn="ctr">
-              <a:spcAft>
-                <a:spcPts val="600"/>
-              </a:spcAft>
-            </a:pPr>
-            <a:r>
-              <a:rPr sz="1400" b="0">
-                <a:solidFill>
-                  <a:srgbClr val="6F645B"/>
-                </a:solidFill>
-                <a:latin typeface="Calibri"/>
-              </a:rPr>
-              <a:t>una tarjeta</a:t>
-            </a:r>
-          </a:p>
-        </p:txBody>
-      </p:sp>
-      <p:sp>
-        <p:nvSpPr>
-          <p:cNvPr id="13" name="Right Arrow 12"/>
-          <p:cNvSpPr/>
-          <p:nvPr/>
-        </p:nvSpPr>
-        <p:spPr>
-          <a:xfrm>
-            <a:off x="5929884" y="3776472"/>
-            <a:ext cx="393192" cy="402336"/>
-          </a:xfrm>
-          <a:prstGeom prst="rightArrow">
-            <a:avLst/>
-          </a:prstGeom>
-          <a:solidFill>
-            <a:srgbClr val="E3B23C"/>
-          </a:solidFill>
-          <a:ln>
-            <a:noFill/>
-          </a:ln>
-          <a:effectLst/>
-        </p:spPr>
-        <p:style>
-          <a:lnRef idx="1">
-            <a:schemeClr val="accent1"/>
-          </a:lnRef>
-          <a:fillRef idx="3">
-            <a:schemeClr val="accent1"/>
-          </a:fillRef>
-          <a:effectRef idx="2">
-            <a:schemeClr val="accent1"/>
-          </a:effectRef>
-          <a:fontRef idx="minor">
-            <a:schemeClr val="lt1"/>
-          </a:fontRef>
-        </p:style>
-        <p:txBody>
-          <a:bodyPr rtlCol="0" anchor="ctr"/>
-          <a:lstStyle/>
-          <a:p>
-            <a:pPr algn="ctr"/>
-          </a:p>
-        </p:txBody>
-      </p:sp>
-      <p:sp>
-        <p:nvSpPr>
-          <p:cNvPr id="14" name="Rounded Rectangle 13"/>
-          <p:cNvSpPr/>
-          <p:nvPr/>
-        </p:nvSpPr>
-        <p:spPr>
-          <a:xfrm>
-            <a:off x="6377940" y="3017520"/>
-            <a:ext cx="2274570" cy="1920240"/>
-          </a:xfrm>
-          <a:prstGeom prst="roundRect">
-            <a:avLst/>
-          </a:prstGeom>
-          <a:solidFill>
-            <a:srgbClr val="FFFFFF"/>
-          </a:solidFill>
-          <a:ln w="15240">
-            <a:solidFill>
-              <a:srgbClr val="EADDC8"/>
-            </a:solidFill>
-          </a:ln>
-          <a:effectLst/>
-        </p:spPr>
-        <p:style>
-          <a:lnRef idx="1">
-            <a:schemeClr val="accent1"/>
-          </a:lnRef>
-          <a:fillRef idx="3">
-            <a:schemeClr val="accent1"/>
-          </a:fillRef>
-          <a:effectRef idx="2">
-            <a:schemeClr val="accent1"/>
-          </a:effectRef>
-          <a:fontRef idx="minor">
-            <a:schemeClr val="lt1"/>
-          </a:fontRef>
-        </p:style>
-        <p:txBody>
-          <a:bodyPr rtlCol="0" anchor="ctr"/>
-          <a:lstStyle/>
-          <a:p>
-            <a:pPr algn="ctr"/>
-          </a:p>
-        </p:txBody>
-      </p:sp>
-      <p:sp>
-        <p:nvSpPr>
-          <p:cNvPr id="15" name="Rectangle 14"/>
-          <p:cNvSpPr/>
-          <p:nvPr/>
-        </p:nvSpPr>
-        <p:spPr>
-          <a:xfrm>
-            <a:off x="6377940" y="3017520"/>
-            <a:ext cx="2274570" cy="128016"/>
-          </a:xfrm>
-          <a:prstGeom prst="rect">
-            <a:avLst/>
-          </a:prstGeom>
-          <a:solidFill>
-            <a:srgbClr val="4F772D"/>
-          </a:solidFill>
-          <a:ln>
-            <a:noFill/>
-          </a:ln>
-          <a:effectLst/>
-        </p:spPr>
-        <p:style>
-          <a:lnRef idx="1">
-            <a:schemeClr val="accent1"/>
-          </a:lnRef>
-          <a:fillRef idx="3">
-            <a:schemeClr val="accent1"/>
-          </a:fillRef>
-          <a:effectRef idx="2">
-            <a:schemeClr val="accent1"/>
-          </a:effectRef>
-          <a:fontRef idx="minor">
-            <a:schemeClr val="lt1"/>
-          </a:fontRef>
-        </p:style>
-        <p:txBody>
-          <a:bodyPr rtlCol="0" anchor="ctr"/>
-          <a:lstStyle/>
-          <a:p>
-            <a:pPr algn="ctr"/>
-          </a:p>
-        </p:txBody>
-      </p:sp>
-      <p:sp>
-        <p:nvSpPr>
-          <p:cNvPr id="16" name="TextBox 15"/>
-          <p:cNvSpPr txBox="1"/>
-          <p:nvPr/>
-        </p:nvSpPr>
-        <p:spPr>
-          <a:xfrm>
-            <a:off x="6515100" y="3474720"/>
-            <a:ext cx="2000250" cy="1280160"/>
-          </a:xfrm>
-          <a:prstGeom prst="rect">
-            <a:avLst/>
-          </a:prstGeom>
-          <a:noFill/>
-        </p:spPr>
-        <p:txBody>
-          <a:bodyPr wrap="square" anchor="ctr">
-            <a:spAutoFit/>
-          </a:bodyPr>
-          <a:lstStyle/>
-          <a:p>
-            <a:pPr algn="ctr">
-              <a:spcAft>
-                <a:spcPts val="600"/>
-              </a:spcAft>
-            </a:pPr>
-            <a:r>
-              <a:rPr sz="1900" b="1">
-                <a:solidFill>
-                  <a:srgbClr val="6D2E46"/>
-                </a:solidFill>
-                <a:latin typeface="Calibri"/>
-              </a:rPr>
-              <a:t>Detalle</a:t>
-            </a:r>
-          </a:p>
-          <a:p>
-            <a:pPr algn="ctr">
-              <a:spcAft>
-                <a:spcPts val="600"/>
-              </a:spcAft>
-            </a:pPr>
-            <a:r>
-              <a:rPr sz="1400" b="0">
-                <a:solidFill>
-                  <a:srgbClr val="6F645B"/>
-                </a:solidFill>
-                <a:latin typeface="Calibri"/>
-              </a:rPr>
-              <a:t>info completa</a:t>
-            </a:r>
-          </a:p>
-        </p:txBody>
-      </p:sp>
-      <p:sp>
-        <p:nvSpPr>
-          <p:cNvPr id="17" name="Right Arrow 16"/>
-          <p:cNvSpPr/>
-          <p:nvPr/>
-        </p:nvSpPr>
-        <p:spPr>
-          <a:xfrm>
-            <a:off x="8707374" y="3776472"/>
-            <a:ext cx="393192" cy="402336"/>
-          </a:xfrm>
-          <a:prstGeom prst="rightArrow">
-            <a:avLst/>
-          </a:prstGeom>
-          <a:solidFill>
-            <a:srgbClr val="E3B23C"/>
-          </a:solidFill>
-          <a:ln>
-            <a:noFill/>
-          </a:ln>
-          <a:effectLst/>
-        </p:spPr>
-        <p:style>
-          <a:lnRef idx="1">
-            <a:schemeClr val="accent1"/>
-          </a:lnRef>
-          <a:fillRef idx="3">
-            <a:schemeClr val="accent1"/>
-          </a:fillRef>
-          <a:effectRef idx="2">
-            <a:schemeClr val="accent1"/>
-          </a:effectRef>
-          <a:fontRef idx="minor">
-            <a:schemeClr val="lt1"/>
-          </a:fontRef>
-        </p:style>
-        <p:txBody>
-          <a:bodyPr rtlCol="0" anchor="ctr"/>
-          <a:lstStyle/>
-          <a:p>
-            <a:pPr algn="ctr"/>
-          </a:p>
-        </p:txBody>
-      </p:sp>
-      <p:sp>
-        <p:nvSpPr>
-          <p:cNvPr id="18" name="Rounded Rectangle 17"/>
-          <p:cNvSpPr/>
-          <p:nvPr/>
-        </p:nvSpPr>
-        <p:spPr>
-          <a:xfrm>
-            <a:off x="9155430" y="3017520"/>
-            <a:ext cx="2274570" cy="1920240"/>
-          </a:xfrm>
-          <a:prstGeom prst="roundRect">
-            <a:avLst/>
-          </a:prstGeom>
-          <a:solidFill>
-            <a:srgbClr val="FFFFFF"/>
-          </a:solidFill>
-          <a:ln w="15240">
-            <a:solidFill>
-              <a:srgbClr val="EADDC8"/>
-            </a:solidFill>
-          </a:ln>
-          <a:effectLst/>
-        </p:spPr>
-        <p:style>
-          <a:lnRef idx="1">
-            <a:schemeClr val="accent1"/>
-          </a:lnRef>
-          <a:fillRef idx="3">
-            <a:schemeClr val="accent1"/>
-          </a:fillRef>
-          <a:effectRef idx="2">
-            <a:schemeClr val="accent1"/>
-          </a:effectRef>
-          <a:fontRef idx="minor">
-            <a:schemeClr val="lt1"/>
-          </a:fontRef>
-        </p:style>
-        <p:txBody>
-          <a:bodyPr rtlCol="0" anchor="ctr"/>
-          <a:lstStyle/>
-          <a:p>
-            <a:pPr algn="ctr"/>
-          </a:p>
-        </p:txBody>
-      </p:sp>
-      <p:sp>
-        <p:nvSpPr>
-          <p:cNvPr id="19" name="Rectangle 18"/>
-          <p:cNvSpPr/>
-          <p:nvPr/>
-        </p:nvSpPr>
-        <p:spPr>
-          <a:xfrm>
-            <a:off x="9155430" y="3017520"/>
-            <a:ext cx="2274570" cy="128016"/>
-          </a:xfrm>
-          <a:prstGeom prst="rect">
-            <a:avLst/>
-          </a:prstGeom>
-          <a:solidFill>
-            <a:srgbClr val="3A6B7E"/>
-          </a:solidFill>
-          <a:ln>
-            <a:noFill/>
-          </a:ln>
-          <a:effectLst/>
-        </p:spPr>
-        <p:style>
-          <a:lnRef idx="1">
-            <a:schemeClr val="accent1"/>
-          </a:lnRef>
-          <a:fillRef idx="3">
-            <a:schemeClr val="accent1"/>
-          </a:fillRef>
-          <a:effectRef idx="2">
-            <a:schemeClr val="accent1"/>
-          </a:effectRef>
-          <a:fontRef idx="minor">
-            <a:schemeClr val="lt1"/>
-          </a:fontRef>
-        </p:style>
-        <p:txBody>
-          <a:bodyPr rtlCol="0" anchor="ctr"/>
-          <a:lstStyle/>
-          <a:p>
-            <a:pPr algn="ctr"/>
-          </a:p>
-        </p:txBody>
-      </p:sp>
-      <p:sp>
-        <p:nvSpPr>
-          <p:cNvPr id="20" name="TextBox 19"/>
-          <p:cNvSpPr txBox="1"/>
-          <p:nvPr/>
-        </p:nvSpPr>
-        <p:spPr>
-          <a:xfrm>
-            <a:off x="9292590" y="3474720"/>
-            <a:ext cx="2000250" cy="1280160"/>
-          </a:xfrm>
-          <a:prstGeom prst="rect">
-            <a:avLst/>
-          </a:prstGeom>
-          <a:noFill/>
-        </p:spPr>
-        <p:txBody>
-          <a:bodyPr wrap="square" anchor="ctr">
-            <a:spAutoFit/>
-          </a:bodyPr>
-          <a:lstStyle/>
-          <a:p>
-            <a:pPr algn="ctr">
-              <a:spcAft>
-                <a:spcPts val="600"/>
-              </a:spcAft>
-            </a:pPr>
-            <a:r>
-              <a:rPr sz="1900" b="1">
-                <a:solidFill>
-                  <a:srgbClr val="6D2E46"/>
-                </a:solidFill>
-                <a:latin typeface="Calibri"/>
-              </a:rPr>
-              <a:t>Volver</a:t>
-            </a:r>
-          </a:p>
-          <a:p>
-            <a:pPr algn="ctr">
-              <a:spcAft>
-                <a:spcPts val="600"/>
-              </a:spcAft>
-            </a:pPr>
-            <a:r>
-              <a:rPr sz="1400" b="0">
-                <a:solidFill>
-                  <a:srgbClr val="6F645B"/>
-                </a:solidFill>
-                <a:latin typeface="Calibri"/>
-              </a:rPr>
-              <a:t>a la lista</a:t>
-            </a:r>
-          </a:p>
-        </p:txBody>
-      </p:sp>
-      <p:sp>
-        <p:nvSpPr>
-          <p:cNvPr id="21" name="TextBox 20"/>
-          <p:cNvSpPr txBox="1"/>
-          <p:nvPr/>
-        </p:nvSpPr>
-        <p:spPr>
-          <a:xfrm>
-            <a:off x="868680" y="5394960"/>
-            <a:ext cx="10424160" cy="731520"/>
-          </a:xfrm>
-          <a:prstGeom prst="rect">
-            <a:avLst/>
-          </a:prstGeom>
-          <a:noFill/>
-        </p:spPr>
-        <p:txBody>
-          <a:bodyPr wrap="square" anchor="t">
-            <a:spAutoFit/>
-          </a:bodyPr>
-          <a:lstStyle/>
-          <a:p>
-            <a:pPr algn="l">
-              <a:spcAft>
-                <a:spcPts val="600"/>
-              </a:spcAft>
-            </a:pPr>
-            <a:r>
-              <a:rPr sz="1700" b="0">
-                <a:solidFill>
-                  <a:srgbClr val="2B2B2B"/>
-                </a:solidFill>
-                <a:latin typeface="Calibri"/>
-              </a:rPr>
-              <a:t>Este mismo patrón lo usarás en casi todas las apps: una pantalla que muestra muchos elementos y otra que muestra uno a fondo.</a:t>
+              <a:t>Vista de detalle</a:t>
             </a:r>
           </a:p>
         </p:txBody>
